--- a/Curso Gas B/16 - UNE 60670 - Instalaciones en servicio y control periodico/16 - UNE 60670 - Instalaciones en servicio y control periodico - Vídeo 3.pptx
+++ b/Curso Gas B/16 - UNE 60670 - Instalaciones en servicio y control periodico/16 - UNE 60670 - Instalaciones en servicio y control periodico - Vídeo 3.pptx
@@ -5130,7 +5130,7 @@
             <a:r>
               <a:rPr sz="1400" b="1" i="0">
                 <a:solidFill>
-                  <a:srgbClr val="CADCFC"/>
+                  <a:srgbClr val="F4A24C"/>
                 </a:solidFill>
                 <a:latin typeface="Montserrat"/>
               </a:rPr>
@@ -5141,13 +5141,57 @@
       </p:sp>
       <p:sp>
         <p:nvSpPr>
-          <p:cNvPr id="4" name="TextBox 3"/>
+          <p:cNvPr id="4" name="Rounded Rectangle 3"/>
+          <p:cNvSpPr/>
+          <p:nvPr/>
+        </p:nvSpPr>
+        <p:spPr>
+          <a:xfrm>
+            <a:off x="868680" y="2057400"/>
+            <a:ext cx="1463040" cy="82296"/>
+          </a:xfrm>
+          <a:prstGeom prst="roundRect">
+            <a:avLst/>
+          </a:prstGeom>
+          <a:solidFill>
+            <a:srgbClr val="E8801A"/>
+          </a:solidFill>
+          <a:ln>
+            <a:noFill/>
+          </a:ln>
+          <a:effectLst/>
+        </p:spPr>
+        <p:style>
+          <a:lnRef idx="1">
+            <a:schemeClr val="accent1"/>
+          </a:lnRef>
+          <a:fillRef idx="3">
+            <a:schemeClr val="accent1"/>
+          </a:fillRef>
+          <a:effectRef idx="2">
+            <a:schemeClr val="accent1"/>
+          </a:effectRef>
+          <a:fontRef idx="minor">
+            <a:schemeClr val="lt1"/>
+          </a:fontRef>
+        </p:style>
+        <p:txBody>
+          <a:bodyPr rtlCol="0" anchor="ctr"/>
+          <a:lstStyle/>
+          <a:p>
+            <a:pPr algn="ctr"/>
+          </a:p>
+        </p:txBody>
+      </p:sp>
+      <p:sp>
+        <p:nvSpPr>
+          <p:cNvPr id="5" name="TextBox 4"/>
           <p:cNvSpPr txBox="1"/>
           <p:nvPr/>
         </p:nvSpPr>
         <p:spPr>
           <a:xfrm>
-            <a:off x="822960" y="2194560"/>
+            <a:off x="822960" y="2286000"/>
             <a:ext cx="10515600" cy="2011680"/>
           </a:xfrm>
           <a:prstGeom prst="rect">
@@ -5186,7 +5230,7 @@
       </p:sp>
       <p:sp>
         <p:nvSpPr>
-          <p:cNvPr id="5" name="TextBox 4"/>
+          <p:cNvPr id="6" name="TextBox 5"/>
           <p:cNvSpPr txBox="1"/>
           <p:nvPr/>
         </p:nvSpPr>
@@ -5358,7 +5402,7 @@
         <p:spPr>
           <a:xfrm>
             <a:off x="822960" y="457200"/>
-            <a:ext cx="8229600" cy="365760"/>
+            <a:ext cx="10058400" cy="365760"/>
           </a:xfrm>
           <a:prstGeom prst="rect">
             <a:avLst/>
@@ -5372,9 +5416,9 @@
           <a:lstStyle/>
           <a:p>
             <a:r>
-              <a:rPr sz="1200" b="1" i="0">
-                <a:solidFill>
-                  <a:srgbClr val="64748B"/>
+              <a:rPr sz="1300" b="1" i="0">
+                <a:solidFill>
+                  <a:srgbClr val="E8801A"/>
                 </a:solidFill>
                 <a:latin typeface="Montserrat"/>
               </a:rPr>
@@ -5406,7 +5450,7 @@
           <a:lstStyle/>
           <a:p>
             <a:r>
-              <a:rPr sz="2700" b="1" i="0">
+              <a:rPr sz="2800" b="1" i="0">
                 <a:solidFill>
                   <a:srgbClr val="1E2761"/>
                 </a:solidFill>
@@ -5419,13 +5463,57 @@
       </p:sp>
       <p:sp>
         <p:nvSpPr>
-          <p:cNvPr id="7" name="TextBox 6"/>
+          <p:cNvPr id="7" name="Rounded Rectangle 6"/>
+          <p:cNvSpPr/>
+          <p:nvPr/>
+        </p:nvSpPr>
+        <p:spPr>
+          <a:xfrm>
+            <a:off x="868680" y="1627632"/>
+            <a:ext cx="2011680" cy="73152"/>
+          </a:xfrm>
+          <a:prstGeom prst="roundRect">
+            <a:avLst/>
+          </a:prstGeom>
+          <a:solidFill>
+            <a:srgbClr val="E8801A"/>
+          </a:solidFill>
+          <a:ln>
+            <a:noFill/>
+          </a:ln>
+          <a:effectLst/>
+        </p:spPr>
+        <p:style>
+          <a:lnRef idx="1">
+            <a:schemeClr val="accent1"/>
+          </a:lnRef>
+          <a:fillRef idx="3">
+            <a:schemeClr val="accent1"/>
+          </a:fillRef>
+          <a:effectRef idx="2">
+            <a:schemeClr val="accent1"/>
+          </a:effectRef>
+          <a:fontRef idx="minor">
+            <a:schemeClr val="lt1"/>
+          </a:fontRef>
+        </p:style>
+        <p:txBody>
+          <a:bodyPr rtlCol="0" anchor="ctr"/>
+          <a:lstStyle/>
+          <a:p>
+            <a:pPr algn="ctr"/>
+          </a:p>
+        </p:txBody>
+      </p:sp>
+      <p:sp>
+        <p:nvSpPr>
+          <p:cNvPr id="8" name="TextBox 7"/>
           <p:cNvSpPr txBox="1"/>
           <p:nvPr/>
         </p:nvSpPr>
         <p:spPr>
           <a:xfrm>
-            <a:off x="822960" y="1920240"/>
+            <a:off x="822960" y="1965960"/>
             <a:ext cx="4983480" cy="4206240"/>
           </a:xfrm>
           <a:prstGeom prst="rect">
@@ -5441,17 +5529,17 @@
           <a:p>
             <a:pPr>
               <a:spcAft>
-                <a:spcPts val="1000"/>
+                <a:spcPts val="1100"/>
               </a:spcAft>
             </a:pPr>
             <a:r>
               <a:rPr sz="1600" b="1" i="0">
                 <a:solidFill>
-                  <a:srgbClr val="2E3A80"/>
-                </a:solidFill>
-                <a:latin typeface="Montserrat"/>
-              </a:rPr>
-              <a:t>•  </a:t>
+                  <a:srgbClr val="E8801A"/>
+                </a:solidFill>
+                <a:latin typeface="Montserrat"/>
+              </a:rPr>
+              <a:t>▸  </a:t>
             </a:r>
             <a:r>
               <a:rPr sz="1600" b="0" i="0">
@@ -5466,17 +5554,17 @@
           <a:p>
             <a:pPr>
               <a:spcAft>
-                <a:spcPts val="1000"/>
+                <a:spcPts val="1100"/>
               </a:spcAft>
             </a:pPr>
             <a:r>
               <a:rPr sz="1600" b="1" i="0">
                 <a:solidFill>
-                  <a:srgbClr val="2E3A80"/>
-                </a:solidFill>
-                <a:latin typeface="Montserrat"/>
-              </a:rPr>
-              <a:t>•  </a:t>
+                  <a:srgbClr val="E8801A"/>
+                </a:solidFill>
+                <a:latin typeface="Montserrat"/>
+              </a:rPr>
+              <a:t>▸  </a:t>
             </a:r>
             <a:r>
               <a:rPr sz="1600" b="0" i="0">
@@ -5491,17 +5579,17 @@
           <a:p>
             <a:pPr>
               <a:spcAft>
-                <a:spcPts val="1000"/>
+                <a:spcPts val="1100"/>
               </a:spcAft>
             </a:pPr>
             <a:r>
               <a:rPr sz="1600" b="1" i="0">
                 <a:solidFill>
-                  <a:srgbClr val="2E3A80"/>
-                </a:solidFill>
-                <a:latin typeface="Montserrat"/>
-              </a:rPr>
-              <a:t>•  </a:t>
+                  <a:srgbClr val="E8801A"/>
+                </a:solidFill>
+                <a:latin typeface="Montserrat"/>
+              </a:rPr>
+              <a:t>▸  </a:t>
             </a:r>
             <a:r>
               <a:rPr sz="1600" b="0" i="0">
@@ -5516,17 +5604,17 @@
           <a:p>
             <a:pPr>
               <a:spcAft>
-                <a:spcPts val="1000"/>
+                <a:spcPts val="1100"/>
               </a:spcAft>
             </a:pPr>
             <a:r>
               <a:rPr sz="1600" b="1" i="0">
                 <a:solidFill>
-                  <a:srgbClr val="2E3A80"/>
-                </a:solidFill>
-                <a:latin typeface="Montserrat"/>
-              </a:rPr>
-              <a:t>•  </a:t>
+                  <a:srgbClr val="E8801A"/>
+                </a:solidFill>
+                <a:latin typeface="Montserrat"/>
+              </a:rPr>
+              <a:t>▸  </a:t>
             </a:r>
             <a:r>
               <a:rPr sz="1600" b="0" i="0">
@@ -5542,7 +5630,7 @@
       </p:sp>
       <p:sp>
         <p:nvSpPr>
-          <p:cNvPr id="8" name="imgph" descr="IMGQ:warning signs gas installation safety labels"/>
+          <p:cNvPr id="9" name="imgph" descr="IMGQ:warning signs gas installation safety labels"/>
           <p:cNvSpPr/>
           <p:nvPr/>
         </p:nvSpPr>
@@ -5588,7 +5676,7 @@
       </p:sp>
       <p:sp>
         <p:nvSpPr>
-          <p:cNvPr id="9" name="TextBox 8"/>
+          <p:cNvPr id="10" name="TextBox 9"/>
           <p:cNvSpPr txBox="1"/>
           <p:nvPr/>
         </p:nvSpPr>
@@ -5773,7 +5861,7 @@
         <p:spPr>
           <a:xfrm>
             <a:off x="822960" y="457200"/>
-            <a:ext cx="8229600" cy="365760"/>
+            <a:ext cx="10058400" cy="365760"/>
           </a:xfrm>
           <a:prstGeom prst="rect">
             <a:avLst/>
@@ -5787,9 +5875,9 @@
           <a:lstStyle/>
           <a:p>
             <a:r>
-              <a:rPr sz="1200" b="1" i="0">
-                <a:solidFill>
-                  <a:srgbClr val="64748B"/>
+              <a:rPr sz="1300" b="1" i="0">
+                <a:solidFill>
+                  <a:srgbClr val="E8801A"/>
                 </a:solidFill>
                 <a:latin typeface="Montserrat"/>
               </a:rPr>
@@ -5821,7 +5909,7 @@
           <a:lstStyle/>
           <a:p>
             <a:r>
-              <a:rPr sz="2700" b="1" i="0">
+              <a:rPr sz="2800" b="1" i="0">
                 <a:solidFill>
                   <a:srgbClr val="1E2761"/>
                 </a:solidFill>
@@ -5834,13 +5922,57 @@
       </p:sp>
       <p:sp>
         <p:nvSpPr>
-          <p:cNvPr id="7" name="TextBox 6"/>
+          <p:cNvPr id="7" name="Rounded Rectangle 6"/>
+          <p:cNvSpPr/>
+          <p:nvPr/>
+        </p:nvSpPr>
+        <p:spPr>
+          <a:xfrm>
+            <a:off x="868680" y="1627632"/>
+            <a:ext cx="2011680" cy="73152"/>
+          </a:xfrm>
+          <a:prstGeom prst="roundRect">
+            <a:avLst/>
+          </a:prstGeom>
+          <a:solidFill>
+            <a:srgbClr val="E8801A"/>
+          </a:solidFill>
+          <a:ln>
+            <a:noFill/>
+          </a:ln>
+          <a:effectLst/>
+        </p:spPr>
+        <p:style>
+          <a:lnRef idx="1">
+            <a:schemeClr val="accent1"/>
+          </a:lnRef>
+          <a:fillRef idx="3">
+            <a:schemeClr val="accent1"/>
+          </a:fillRef>
+          <a:effectRef idx="2">
+            <a:schemeClr val="accent1"/>
+          </a:effectRef>
+          <a:fontRef idx="minor">
+            <a:schemeClr val="lt1"/>
+          </a:fontRef>
+        </p:style>
+        <p:txBody>
+          <a:bodyPr rtlCol="0" anchor="ctr"/>
+          <a:lstStyle/>
+          <a:p>
+            <a:pPr algn="ctr"/>
+          </a:p>
+        </p:txBody>
+      </p:sp>
+      <p:sp>
+        <p:nvSpPr>
+          <p:cNvPr id="8" name="TextBox 7"/>
           <p:cNvSpPr txBox="1"/>
           <p:nvPr/>
         </p:nvSpPr>
         <p:spPr>
           <a:xfrm>
-            <a:off x="822960" y="1920240"/>
+            <a:off x="822960" y="1965960"/>
             <a:ext cx="4983480" cy="4206240"/>
           </a:xfrm>
           <a:prstGeom prst="rect">
@@ -5856,17 +5988,17 @@
           <a:p>
             <a:pPr>
               <a:spcAft>
-                <a:spcPts val="1000"/>
+                <a:spcPts val="1100"/>
               </a:spcAft>
             </a:pPr>
             <a:r>
               <a:rPr sz="1600" b="1" i="0">
                 <a:solidFill>
-                  <a:srgbClr val="2E3A80"/>
-                </a:solidFill>
-                <a:latin typeface="Montserrat"/>
-              </a:rPr>
-              <a:t>•  </a:t>
+                  <a:srgbClr val="E8801A"/>
+                </a:solidFill>
+                <a:latin typeface="Montserrat"/>
+              </a:rPr>
+              <a:t>▸  </a:t>
             </a:r>
             <a:r>
               <a:rPr sz="1600" b="0" i="0">
@@ -5881,17 +6013,17 @@
           <a:p>
             <a:pPr>
               <a:spcAft>
-                <a:spcPts val="1000"/>
+                <a:spcPts val="1100"/>
               </a:spcAft>
             </a:pPr>
             <a:r>
               <a:rPr sz="1600" b="1" i="0">
                 <a:solidFill>
-                  <a:srgbClr val="2E3A80"/>
-                </a:solidFill>
-                <a:latin typeface="Montserrat"/>
-              </a:rPr>
-              <a:t>•  </a:t>
+                  <a:srgbClr val="E8801A"/>
+                </a:solidFill>
+                <a:latin typeface="Montserrat"/>
+              </a:rPr>
+              <a:t>▸  </a:t>
             </a:r>
             <a:r>
               <a:rPr sz="1600" b="0" i="0">
@@ -5906,17 +6038,17 @@
           <a:p>
             <a:pPr>
               <a:spcAft>
-                <a:spcPts val="1000"/>
+                <a:spcPts val="1100"/>
               </a:spcAft>
             </a:pPr>
             <a:r>
               <a:rPr sz="1600" b="1" i="0">
                 <a:solidFill>
-                  <a:srgbClr val="2E3A80"/>
-                </a:solidFill>
-                <a:latin typeface="Montserrat"/>
-              </a:rPr>
-              <a:t>•  </a:t>
+                  <a:srgbClr val="E8801A"/>
+                </a:solidFill>
+                <a:latin typeface="Montserrat"/>
+              </a:rPr>
+              <a:t>▸  </a:t>
             </a:r>
             <a:r>
               <a:rPr sz="1600" b="0" i="0">
@@ -5931,17 +6063,17 @@
           <a:p>
             <a:pPr>
               <a:spcAft>
-                <a:spcPts val="1000"/>
+                <a:spcPts val="1100"/>
               </a:spcAft>
             </a:pPr>
             <a:r>
               <a:rPr sz="1600" b="1" i="0">
                 <a:solidFill>
-                  <a:srgbClr val="2E3A80"/>
-                </a:solidFill>
-                <a:latin typeface="Montserrat"/>
-              </a:rPr>
-              <a:t>•  </a:t>
+                  <a:srgbClr val="E8801A"/>
+                </a:solidFill>
+                <a:latin typeface="Montserrat"/>
+              </a:rPr>
+              <a:t>▸  </a:t>
             </a:r>
             <a:r>
               <a:rPr sz="1600" b="0" i="0">
@@ -5957,7 +6089,7 @@
       </p:sp>
       <p:sp>
         <p:nvSpPr>
-          <p:cNvPr id="8" name="imgph" descr="IMGQ:dry powder fire extinguisher red wall mounted"/>
+          <p:cNvPr id="9" name="imgph" descr="IMGQ:dry powder fire extinguisher red wall mounted"/>
           <p:cNvSpPr/>
           <p:nvPr/>
         </p:nvSpPr>
@@ -6003,7 +6135,7 @@
       </p:sp>
       <p:sp>
         <p:nvSpPr>
-          <p:cNvPr id="9" name="TextBox 8"/>
+          <p:cNvPr id="10" name="TextBox 9"/>
           <p:cNvSpPr txBox="1"/>
           <p:nvPr/>
         </p:nvSpPr>
@@ -6188,7 +6320,7 @@
         <p:spPr>
           <a:xfrm>
             <a:off x="822960" y="457200"/>
-            <a:ext cx="8229600" cy="365760"/>
+            <a:ext cx="10058400" cy="365760"/>
           </a:xfrm>
           <a:prstGeom prst="rect">
             <a:avLst/>
@@ -6202,9 +6334,9 @@
           <a:lstStyle/>
           <a:p>
             <a:r>
-              <a:rPr sz="1200" b="1" i="0">
-                <a:solidFill>
-                  <a:srgbClr val="64748B"/>
+              <a:rPr sz="1300" b="1" i="0">
+                <a:solidFill>
+                  <a:srgbClr val="E8801A"/>
                 </a:solidFill>
                 <a:latin typeface="Montserrat"/>
               </a:rPr>
@@ -6236,7 +6368,7 @@
           <a:lstStyle/>
           <a:p>
             <a:r>
-              <a:rPr sz="2700" b="1" i="0">
+              <a:rPr sz="2800" b="1" i="0">
                 <a:solidFill>
                   <a:srgbClr val="1E2761"/>
                 </a:solidFill>
@@ -6249,13 +6381,57 @@
       </p:sp>
       <p:sp>
         <p:nvSpPr>
-          <p:cNvPr id="7" name="TextBox 6"/>
+          <p:cNvPr id="7" name="Rounded Rectangle 6"/>
+          <p:cNvSpPr/>
+          <p:nvPr/>
+        </p:nvSpPr>
+        <p:spPr>
+          <a:xfrm>
+            <a:off x="868680" y="1627632"/>
+            <a:ext cx="2011680" cy="73152"/>
+          </a:xfrm>
+          <a:prstGeom prst="roundRect">
+            <a:avLst/>
+          </a:prstGeom>
+          <a:solidFill>
+            <a:srgbClr val="E8801A"/>
+          </a:solidFill>
+          <a:ln>
+            <a:noFill/>
+          </a:ln>
+          <a:effectLst/>
+        </p:spPr>
+        <p:style>
+          <a:lnRef idx="1">
+            <a:schemeClr val="accent1"/>
+          </a:lnRef>
+          <a:fillRef idx="3">
+            <a:schemeClr val="accent1"/>
+          </a:fillRef>
+          <a:effectRef idx="2">
+            <a:schemeClr val="accent1"/>
+          </a:effectRef>
+          <a:fontRef idx="minor">
+            <a:schemeClr val="lt1"/>
+          </a:fontRef>
+        </p:style>
+        <p:txBody>
+          <a:bodyPr rtlCol="0" anchor="ctr"/>
+          <a:lstStyle/>
+          <a:p>
+            <a:pPr algn="ctr"/>
+          </a:p>
+        </p:txBody>
+      </p:sp>
+      <p:sp>
+        <p:nvSpPr>
+          <p:cNvPr id="8" name="TextBox 7"/>
           <p:cNvSpPr txBox="1"/>
           <p:nvPr/>
         </p:nvSpPr>
         <p:spPr>
           <a:xfrm>
-            <a:off x="822960" y="1920240"/>
+            <a:off x="822960" y="1965960"/>
             <a:ext cx="4983480" cy="4206240"/>
           </a:xfrm>
           <a:prstGeom prst="rect">
@@ -6271,17 +6447,17 @@
           <a:p>
             <a:pPr>
               <a:spcAft>
-                <a:spcPts val="1000"/>
+                <a:spcPts val="1100"/>
               </a:spcAft>
             </a:pPr>
             <a:r>
               <a:rPr sz="1600" b="1" i="0">
                 <a:solidFill>
-                  <a:srgbClr val="2E3A80"/>
-                </a:solidFill>
-                <a:latin typeface="Montserrat"/>
-              </a:rPr>
-              <a:t>•  </a:t>
+                  <a:srgbClr val="E8801A"/>
+                </a:solidFill>
+                <a:latin typeface="Montserrat"/>
+              </a:rPr>
+              <a:t>▸  </a:t>
             </a:r>
             <a:r>
               <a:rPr sz="1600" b="0" i="0">
@@ -6296,17 +6472,17 @@
           <a:p>
             <a:pPr>
               <a:spcAft>
-                <a:spcPts val="1000"/>
+                <a:spcPts val="1100"/>
               </a:spcAft>
             </a:pPr>
             <a:r>
               <a:rPr sz="1600" b="1" i="0">
                 <a:solidFill>
-                  <a:srgbClr val="2E3A80"/>
-                </a:solidFill>
-                <a:latin typeface="Montserrat"/>
-              </a:rPr>
-              <a:t>•  </a:t>
+                  <a:srgbClr val="E8801A"/>
+                </a:solidFill>
+                <a:latin typeface="Montserrat"/>
+              </a:rPr>
+              <a:t>▸  </a:t>
             </a:r>
             <a:r>
               <a:rPr sz="1600" b="0" i="0">
@@ -6321,17 +6497,17 @@
           <a:p>
             <a:pPr>
               <a:spcAft>
-                <a:spcPts val="1000"/>
+                <a:spcPts val="1100"/>
               </a:spcAft>
             </a:pPr>
             <a:r>
               <a:rPr sz="1600" b="1" i="0">
                 <a:solidFill>
-                  <a:srgbClr val="2E3A80"/>
-                </a:solidFill>
-                <a:latin typeface="Montserrat"/>
-              </a:rPr>
-              <a:t>•  </a:t>
+                  <a:srgbClr val="E8801A"/>
+                </a:solidFill>
+                <a:latin typeface="Montserrat"/>
+              </a:rPr>
+              <a:t>▸  </a:t>
             </a:r>
             <a:r>
               <a:rPr sz="1600" b="0" i="0">
@@ -6346,17 +6522,17 @@
           <a:p>
             <a:pPr>
               <a:spcAft>
-                <a:spcPts val="1000"/>
+                <a:spcPts val="1100"/>
               </a:spcAft>
             </a:pPr>
             <a:r>
               <a:rPr sz="1600" b="1" i="0">
                 <a:solidFill>
-                  <a:srgbClr val="2E3A80"/>
-                </a:solidFill>
-                <a:latin typeface="Montserrat"/>
-              </a:rPr>
-              <a:t>•  </a:t>
+                  <a:srgbClr val="E8801A"/>
+                </a:solidFill>
+                <a:latin typeface="Montserrat"/>
+              </a:rPr>
+              <a:t>▸  </a:t>
             </a:r>
             <a:r>
               <a:rPr sz="1600" b="0" i="0">
@@ -6372,7 +6548,7 @@
       </p:sp>
       <p:sp>
         <p:nvSpPr>
-          <p:cNvPr id="8" name="imgph" descr="IMGQ:gas main shut off valve behind obstacles"/>
+          <p:cNvPr id="9" name="imgph" descr="IMGQ:gas main shut off valve behind obstacles"/>
           <p:cNvSpPr/>
           <p:nvPr/>
         </p:nvSpPr>
@@ -6418,7 +6594,7 @@
       </p:sp>
       <p:sp>
         <p:nvSpPr>
-          <p:cNvPr id="9" name="TextBox 8"/>
+          <p:cNvPr id="10" name="TextBox 9"/>
           <p:cNvSpPr txBox="1"/>
           <p:nvPr/>
         </p:nvSpPr>
@@ -6603,7 +6779,7 @@
         <p:spPr>
           <a:xfrm>
             <a:off x="822960" y="457200"/>
-            <a:ext cx="8229600" cy="365760"/>
+            <a:ext cx="10058400" cy="365760"/>
           </a:xfrm>
           <a:prstGeom prst="rect">
             <a:avLst/>
@@ -6617,9 +6793,9 @@
           <a:lstStyle/>
           <a:p>
             <a:r>
-              <a:rPr sz="1200" b="1" i="0">
-                <a:solidFill>
-                  <a:srgbClr val="64748B"/>
+              <a:rPr sz="1300" b="1" i="0">
+                <a:solidFill>
+                  <a:srgbClr val="E8801A"/>
                 </a:solidFill>
                 <a:latin typeface="Montserrat"/>
               </a:rPr>
@@ -6651,7 +6827,7 @@
           <a:lstStyle/>
           <a:p>
             <a:r>
-              <a:rPr sz="2700" b="1" i="0">
+              <a:rPr sz="2800" b="1" i="0">
                 <a:solidFill>
                   <a:srgbClr val="1E2761"/>
                 </a:solidFill>
@@ -6664,13 +6840,57 @@
       </p:sp>
       <p:sp>
         <p:nvSpPr>
-          <p:cNvPr id="7" name="TextBox 6"/>
+          <p:cNvPr id="7" name="Rounded Rectangle 6"/>
+          <p:cNvSpPr/>
+          <p:nvPr/>
+        </p:nvSpPr>
+        <p:spPr>
+          <a:xfrm>
+            <a:off x="868680" y="1627632"/>
+            <a:ext cx="2011680" cy="73152"/>
+          </a:xfrm>
+          <a:prstGeom prst="roundRect">
+            <a:avLst/>
+          </a:prstGeom>
+          <a:solidFill>
+            <a:srgbClr val="E8801A"/>
+          </a:solidFill>
+          <a:ln>
+            <a:noFill/>
+          </a:ln>
+          <a:effectLst/>
+        </p:spPr>
+        <p:style>
+          <a:lnRef idx="1">
+            <a:schemeClr val="accent1"/>
+          </a:lnRef>
+          <a:fillRef idx="3">
+            <a:schemeClr val="accent1"/>
+          </a:fillRef>
+          <a:effectRef idx="2">
+            <a:schemeClr val="accent1"/>
+          </a:effectRef>
+          <a:fontRef idx="minor">
+            <a:schemeClr val="lt1"/>
+          </a:fontRef>
+        </p:style>
+        <p:txBody>
+          <a:bodyPr rtlCol="0" anchor="ctr"/>
+          <a:lstStyle/>
+          <a:p>
+            <a:pPr algn="ctr"/>
+          </a:p>
+        </p:txBody>
+      </p:sp>
+      <p:sp>
+        <p:nvSpPr>
+          <p:cNvPr id="8" name="TextBox 7"/>
           <p:cNvSpPr txBox="1"/>
           <p:nvPr/>
         </p:nvSpPr>
         <p:spPr>
           <a:xfrm>
-            <a:off x="822960" y="1920240"/>
+            <a:off x="822960" y="1965960"/>
             <a:ext cx="4983480" cy="4206240"/>
           </a:xfrm>
           <a:prstGeom prst="rect">
@@ -6686,17 +6906,17 @@
           <a:p>
             <a:pPr>
               <a:spcAft>
-                <a:spcPts val="1000"/>
+                <a:spcPts val="1100"/>
               </a:spcAft>
             </a:pPr>
             <a:r>
               <a:rPr sz="1600" b="1" i="0">
                 <a:solidFill>
-                  <a:srgbClr val="2E3A80"/>
-                </a:solidFill>
-                <a:latin typeface="Montserrat"/>
-              </a:rPr>
-              <a:t>•  </a:t>
+                  <a:srgbClr val="E8801A"/>
+                </a:solidFill>
+                <a:latin typeface="Montserrat"/>
+              </a:rPr>
+              <a:t>▸  </a:t>
             </a:r>
             <a:r>
               <a:rPr sz="1600" b="0" i="0">
@@ -6711,17 +6931,17 @@
           <a:p>
             <a:pPr>
               <a:spcAft>
-                <a:spcPts val="1000"/>
+                <a:spcPts val="1100"/>
               </a:spcAft>
             </a:pPr>
             <a:r>
               <a:rPr sz="1600" b="1" i="0">
                 <a:solidFill>
-                  <a:srgbClr val="2E3A80"/>
-                </a:solidFill>
-                <a:latin typeface="Montserrat"/>
-              </a:rPr>
-              <a:t>•  </a:t>
+                  <a:srgbClr val="E8801A"/>
+                </a:solidFill>
+                <a:latin typeface="Montserrat"/>
+              </a:rPr>
+              <a:t>▸  </a:t>
             </a:r>
             <a:r>
               <a:rPr sz="1600" b="0" i="0">
@@ -6736,17 +6956,17 @@
           <a:p>
             <a:pPr>
               <a:spcAft>
-                <a:spcPts val="1000"/>
+                <a:spcPts val="1100"/>
               </a:spcAft>
             </a:pPr>
             <a:r>
               <a:rPr sz="1600" b="1" i="0">
                 <a:solidFill>
-                  <a:srgbClr val="2E3A80"/>
-                </a:solidFill>
-                <a:latin typeface="Montserrat"/>
-              </a:rPr>
-              <a:t>•  </a:t>
+                  <a:srgbClr val="E8801A"/>
+                </a:solidFill>
+                <a:latin typeface="Montserrat"/>
+              </a:rPr>
+              <a:t>▸  </a:t>
             </a:r>
             <a:r>
               <a:rPr sz="1600" b="0" i="0">
@@ -6761,17 +6981,17 @@
           <a:p>
             <a:pPr>
               <a:spcAft>
-                <a:spcPts val="1000"/>
+                <a:spcPts val="1100"/>
               </a:spcAft>
             </a:pPr>
             <a:r>
               <a:rPr sz="1600" b="1" i="0">
                 <a:solidFill>
-                  <a:srgbClr val="2E3A80"/>
-                </a:solidFill>
-                <a:latin typeface="Montserrat"/>
-              </a:rPr>
-              <a:t>•  </a:t>
+                  <a:srgbClr val="E8801A"/>
+                </a:solidFill>
+                <a:latin typeface="Montserrat"/>
+              </a:rPr>
+              <a:t>▸  </a:t>
             </a:r>
             <a:r>
               <a:rPr sz="1600" b="0" i="0">
@@ -6787,7 +7007,7 @@
       </p:sp>
       <p:sp>
         <p:nvSpPr>
-          <p:cNvPr id="8" name="imgph" descr="IMGQ:building gas riser pipes common installation"/>
+          <p:cNvPr id="9" name="imgph" descr="IMGQ:building gas riser pipes common installation"/>
           <p:cNvSpPr/>
           <p:nvPr/>
         </p:nvSpPr>
@@ -6833,7 +7053,7 @@
       </p:sp>
       <p:sp>
         <p:nvSpPr>
-          <p:cNvPr id="9" name="TextBox 8"/>
+          <p:cNvPr id="10" name="TextBox 9"/>
           <p:cNvSpPr txBox="1"/>
           <p:nvPr/>
         </p:nvSpPr>
@@ -7018,7 +7238,7 @@
         <p:spPr>
           <a:xfrm>
             <a:off x="822960" y="457200"/>
-            <a:ext cx="8229600" cy="365760"/>
+            <a:ext cx="10058400" cy="365760"/>
           </a:xfrm>
           <a:prstGeom prst="rect">
             <a:avLst/>
@@ -7032,9 +7252,9 @@
           <a:lstStyle/>
           <a:p>
             <a:r>
-              <a:rPr sz="1200" b="1" i="0">
-                <a:solidFill>
-                  <a:srgbClr val="64748B"/>
+              <a:rPr sz="1300" b="1" i="0">
+                <a:solidFill>
+                  <a:srgbClr val="E8801A"/>
                 </a:solidFill>
                 <a:latin typeface="Montserrat"/>
               </a:rPr>
@@ -7066,7 +7286,7 @@
           <a:lstStyle/>
           <a:p>
             <a:r>
-              <a:rPr sz="2700" b="1" i="0">
+              <a:rPr sz="2800" b="1" i="0">
                 <a:solidFill>
                   <a:srgbClr val="1E2761"/>
                 </a:solidFill>
@@ -7079,13 +7299,57 @@
       </p:sp>
       <p:sp>
         <p:nvSpPr>
-          <p:cNvPr id="7" name="TextBox 6"/>
+          <p:cNvPr id="7" name="Rounded Rectangle 6"/>
+          <p:cNvSpPr/>
+          <p:nvPr/>
+        </p:nvSpPr>
+        <p:spPr>
+          <a:xfrm>
+            <a:off x="868680" y="1627632"/>
+            <a:ext cx="2011680" cy="73152"/>
+          </a:xfrm>
+          <a:prstGeom prst="roundRect">
+            <a:avLst/>
+          </a:prstGeom>
+          <a:solidFill>
+            <a:srgbClr val="E8801A"/>
+          </a:solidFill>
+          <a:ln>
+            <a:noFill/>
+          </a:ln>
+          <a:effectLst/>
+        </p:spPr>
+        <p:style>
+          <a:lnRef idx="1">
+            <a:schemeClr val="accent1"/>
+          </a:lnRef>
+          <a:fillRef idx="3">
+            <a:schemeClr val="accent1"/>
+          </a:fillRef>
+          <a:effectRef idx="2">
+            <a:schemeClr val="accent1"/>
+          </a:effectRef>
+          <a:fontRef idx="minor">
+            <a:schemeClr val="lt1"/>
+          </a:fontRef>
+        </p:style>
+        <p:txBody>
+          <a:bodyPr rtlCol="0" anchor="ctr"/>
+          <a:lstStyle/>
+          <a:p>
+            <a:pPr algn="ctr"/>
+          </a:p>
+        </p:txBody>
+      </p:sp>
+      <p:sp>
+        <p:nvSpPr>
+          <p:cNvPr id="8" name="TextBox 7"/>
           <p:cNvSpPr txBox="1"/>
           <p:nvPr/>
         </p:nvSpPr>
         <p:spPr>
           <a:xfrm>
-            <a:off x="822960" y="1920240"/>
+            <a:off x="822960" y="1965960"/>
             <a:ext cx="4983480" cy="4206240"/>
           </a:xfrm>
           <a:prstGeom prst="rect">
@@ -7101,17 +7365,17 @@
           <a:p>
             <a:pPr>
               <a:spcAft>
-                <a:spcPts val="1000"/>
+                <a:spcPts val="1100"/>
               </a:spcAft>
             </a:pPr>
             <a:r>
               <a:rPr sz="1600" b="1" i="0">
                 <a:solidFill>
-                  <a:srgbClr val="2E3A80"/>
-                </a:solidFill>
-                <a:latin typeface="Montserrat"/>
-              </a:rPr>
-              <a:t>•  </a:t>
+                  <a:srgbClr val="E8801A"/>
+                </a:solidFill>
+                <a:latin typeface="Montserrat"/>
+              </a:rPr>
+              <a:t>▸  </a:t>
             </a:r>
             <a:r>
               <a:rPr sz="1600" b="0" i="0">
@@ -7126,17 +7390,17 @@
           <a:p>
             <a:pPr>
               <a:spcAft>
-                <a:spcPts val="1000"/>
+                <a:spcPts val="1100"/>
               </a:spcAft>
             </a:pPr>
             <a:r>
               <a:rPr sz="1600" b="1" i="0">
                 <a:solidFill>
-                  <a:srgbClr val="2E3A80"/>
-                </a:solidFill>
-                <a:latin typeface="Montserrat"/>
-              </a:rPr>
-              <a:t>•  </a:t>
+                  <a:srgbClr val="E8801A"/>
+                </a:solidFill>
+                <a:latin typeface="Montserrat"/>
+              </a:rPr>
+              <a:t>▸  </a:t>
             </a:r>
             <a:r>
               <a:rPr sz="1600" b="0" i="0">
@@ -7151,17 +7415,17 @@
           <a:p>
             <a:pPr>
               <a:spcAft>
-                <a:spcPts val="1000"/>
+                <a:spcPts val="1100"/>
               </a:spcAft>
             </a:pPr>
             <a:r>
               <a:rPr sz="1600" b="1" i="0">
                 <a:solidFill>
-                  <a:srgbClr val="2E3A80"/>
-                </a:solidFill>
-                <a:latin typeface="Montserrat"/>
-              </a:rPr>
-              <a:t>•  </a:t>
+                  <a:srgbClr val="E8801A"/>
+                </a:solidFill>
+                <a:latin typeface="Montserrat"/>
+              </a:rPr>
+              <a:t>▸  </a:t>
             </a:r>
             <a:r>
               <a:rPr sz="1600" b="0" i="0">
@@ -7177,7 +7441,7 @@
       </p:sp>
       <p:sp>
         <p:nvSpPr>
-          <p:cNvPr id="8" name="imgph" descr="IMGQ:gas meter cabinet ventilation louvers building"/>
+          <p:cNvPr id="9" name="imgph" descr="IMGQ:gas meter cabinet ventilation louvers building"/>
           <p:cNvSpPr/>
           <p:nvPr/>
         </p:nvSpPr>
@@ -7223,7 +7487,7 @@
       </p:sp>
       <p:sp>
         <p:nvSpPr>
-          <p:cNvPr id="9" name="TextBox 8"/>
+          <p:cNvPr id="10" name="TextBox 9"/>
           <p:cNvSpPr txBox="1"/>
           <p:nvPr/>
         </p:nvSpPr>
@@ -7408,7 +7672,7 @@
         <p:spPr>
           <a:xfrm>
             <a:off x="822960" y="457200"/>
-            <a:ext cx="8229600" cy="365760"/>
+            <a:ext cx="10058400" cy="365760"/>
           </a:xfrm>
           <a:prstGeom prst="rect">
             <a:avLst/>
@@ -7422,9 +7686,9 @@
           <a:lstStyle/>
           <a:p>
             <a:r>
-              <a:rPr sz="1200" b="1" i="0">
-                <a:solidFill>
-                  <a:srgbClr val="64748B"/>
+              <a:rPr sz="1300" b="1" i="0">
+                <a:solidFill>
+                  <a:srgbClr val="E8801A"/>
                 </a:solidFill>
                 <a:latin typeface="Montserrat"/>
               </a:rPr>
@@ -7456,7 +7720,7 @@
           <a:lstStyle/>
           <a:p>
             <a:r>
-              <a:rPr sz="2700" b="1" i="0">
+              <a:rPr sz="2800" b="1" i="0">
                 <a:solidFill>
                   <a:srgbClr val="1E2761"/>
                 </a:solidFill>
@@ -7469,13 +7733,57 @@
       </p:sp>
       <p:sp>
         <p:nvSpPr>
-          <p:cNvPr id="7" name="TextBox 6"/>
+          <p:cNvPr id="7" name="Rounded Rectangle 6"/>
+          <p:cNvSpPr/>
+          <p:nvPr/>
+        </p:nvSpPr>
+        <p:spPr>
+          <a:xfrm>
+            <a:off x="868680" y="1627632"/>
+            <a:ext cx="2011680" cy="73152"/>
+          </a:xfrm>
+          <a:prstGeom prst="roundRect">
+            <a:avLst/>
+          </a:prstGeom>
+          <a:solidFill>
+            <a:srgbClr val="E8801A"/>
+          </a:solidFill>
+          <a:ln>
+            <a:noFill/>
+          </a:ln>
+          <a:effectLst/>
+        </p:spPr>
+        <p:style>
+          <a:lnRef idx="1">
+            <a:schemeClr val="accent1"/>
+          </a:lnRef>
+          <a:fillRef idx="3">
+            <a:schemeClr val="accent1"/>
+          </a:fillRef>
+          <a:effectRef idx="2">
+            <a:schemeClr val="accent1"/>
+          </a:effectRef>
+          <a:fontRef idx="minor">
+            <a:schemeClr val="lt1"/>
+          </a:fontRef>
+        </p:style>
+        <p:txBody>
+          <a:bodyPr rtlCol="0" anchor="ctr"/>
+          <a:lstStyle/>
+          <a:p>
+            <a:pPr algn="ctr"/>
+          </a:p>
+        </p:txBody>
+      </p:sp>
+      <p:sp>
+        <p:nvSpPr>
+          <p:cNvPr id="8" name="TextBox 7"/>
           <p:cNvSpPr txBox="1"/>
           <p:nvPr/>
         </p:nvSpPr>
         <p:spPr>
           <a:xfrm>
-            <a:off x="822960" y="1920240"/>
+            <a:off x="822960" y="1965960"/>
             <a:ext cx="4983480" cy="4206240"/>
           </a:xfrm>
           <a:prstGeom prst="rect">
@@ -7491,17 +7799,17 @@
           <a:p>
             <a:pPr>
               <a:spcAft>
-                <a:spcPts val="1000"/>
+                <a:spcPts val="1100"/>
               </a:spcAft>
             </a:pPr>
             <a:r>
               <a:rPr sz="1600" b="1" i="0">
                 <a:solidFill>
-                  <a:srgbClr val="2E3A80"/>
-                </a:solidFill>
-                <a:latin typeface="Montserrat"/>
-              </a:rPr>
-              <a:t>•  </a:t>
+                  <a:srgbClr val="E8801A"/>
+                </a:solidFill>
+                <a:latin typeface="Montserrat"/>
+              </a:rPr>
+              <a:t>▸  </a:t>
             </a:r>
             <a:r>
               <a:rPr sz="1600" b="0" i="0">
@@ -7516,17 +7824,17 @@
           <a:p>
             <a:pPr>
               <a:spcAft>
-                <a:spcPts val="1000"/>
+                <a:spcPts val="1100"/>
               </a:spcAft>
             </a:pPr>
             <a:r>
               <a:rPr sz="1600" b="1" i="0">
                 <a:solidFill>
-                  <a:srgbClr val="2E3A80"/>
-                </a:solidFill>
-                <a:latin typeface="Montserrat"/>
-              </a:rPr>
-              <a:t>•  </a:t>
+                  <a:srgbClr val="E8801A"/>
+                </a:solidFill>
+                <a:latin typeface="Montserrat"/>
+              </a:rPr>
+              <a:t>▸  </a:t>
             </a:r>
             <a:r>
               <a:rPr sz="1600" b="0" i="0">
@@ -7541,17 +7849,17 @@
           <a:p>
             <a:pPr>
               <a:spcAft>
-                <a:spcPts val="1000"/>
+                <a:spcPts val="1100"/>
               </a:spcAft>
             </a:pPr>
             <a:r>
               <a:rPr sz="1600" b="1" i="0">
                 <a:solidFill>
-                  <a:srgbClr val="2E3A80"/>
-                </a:solidFill>
-                <a:latin typeface="Montserrat"/>
-              </a:rPr>
-              <a:t>•  </a:t>
+                  <a:srgbClr val="E8801A"/>
+                </a:solidFill>
+                <a:latin typeface="Montserrat"/>
+              </a:rPr>
+              <a:t>▸  </a:t>
             </a:r>
             <a:r>
               <a:rPr sz="1600" b="0" i="0">
@@ -7567,7 +7875,7 @@
       </p:sp>
       <p:sp>
         <p:nvSpPr>
-          <p:cNvPr id="8" name="imgph" descr="IMGQ:gas meter room cabinet building basement"/>
+          <p:cNvPr id="9" name="imgph" descr="IMGQ:gas meter room cabinet building basement"/>
           <p:cNvSpPr/>
           <p:nvPr/>
         </p:nvSpPr>
@@ -7613,7 +7921,7 @@
       </p:sp>
       <p:sp>
         <p:nvSpPr>
-          <p:cNvPr id="9" name="TextBox 8"/>
+          <p:cNvPr id="10" name="TextBox 9"/>
           <p:cNvSpPr txBox="1"/>
           <p:nvPr/>
         </p:nvSpPr>
@@ -7798,7 +8106,7 @@
         <p:spPr>
           <a:xfrm>
             <a:off x="822960" y="457200"/>
-            <a:ext cx="8229600" cy="365760"/>
+            <a:ext cx="10058400" cy="365760"/>
           </a:xfrm>
           <a:prstGeom prst="rect">
             <a:avLst/>
@@ -7812,9 +8120,9 @@
           <a:lstStyle/>
           <a:p>
             <a:r>
-              <a:rPr sz="1200" b="1" i="0">
-                <a:solidFill>
-                  <a:srgbClr val="64748B"/>
+              <a:rPr sz="1300" b="1" i="0">
+                <a:solidFill>
+                  <a:srgbClr val="E8801A"/>
                 </a:solidFill>
                 <a:latin typeface="Montserrat"/>
               </a:rPr>
@@ -7846,7 +8154,7 @@
           <a:lstStyle/>
           <a:p>
             <a:r>
-              <a:rPr sz="2700" b="1" i="0">
+              <a:rPr sz="2800" b="1" i="0">
                 <a:solidFill>
                   <a:srgbClr val="1E2761"/>
                 </a:solidFill>
@@ -7859,13 +8167,57 @@
       </p:sp>
       <p:sp>
         <p:nvSpPr>
-          <p:cNvPr id="7" name="TextBox 6"/>
+          <p:cNvPr id="7" name="Rounded Rectangle 6"/>
+          <p:cNvSpPr/>
+          <p:nvPr/>
+        </p:nvSpPr>
+        <p:spPr>
+          <a:xfrm>
+            <a:off x="868680" y="1627632"/>
+            <a:ext cx="2011680" cy="73152"/>
+          </a:xfrm>
+          <a:prstGeom prst="roundRect">
+            <a:avLst/>
+          </a:prstGeom>
+          <a:solidFill>
+            <a:srgbClr val="E8801A"/>
+          </a:solidFill>
+          <a:ln>
+            <a:noFill/>
+          </a:ln>
+          <a:effectLst/>
+        </p:spPr>
+        <p:style>
+          <a:lnRef idx="1">
+            <a:schemeClr val="accent1"/>
+          </a:lnRef>
+          <a:fillRef idx="3">
+            <a:schemeClr val="accent1"/>
+          </a:fillRef>
+          <a:effectRef idx="2">
+            <a:schemeClr val="accent1"/>
+          </a:effectRef>
+          <a:fontRef idx="minor">
+            <a:schemeClr val="lt1"/>
+          </a:fontRef>
+        </p:style>
+        <p:txBody>
+          <a:bodyPr rtlCol="0" anchor="ctr"/>
+          <a:lstStyle/>
+          <a:p>
+            <a:pPr algn="ctr"/>
+          </a:p>
+        </p:txBody>
+      </p:sp>
+      <p:sp>
+        <p:nvSpPr>
+          <p:cNvPr id="8" name="TextBox 7"/>
           <p:cNvSpPr txBox="1"/>
           <p:nvPr/>
         </p:nvSpPr>
         <p:spPr>
           <a:xfrm>
-            <a:off x="822960" y="1920240"/>
+            <a:off x="822960" y="1965960"/>
             <a:ext cx="4983480" cy="4206240"/>
           </a:xfrm>
           <a:prstGeom prst="rect">
@@ -7881,17 +8233,17 @@
           <a:p>
             <a:pPr>
               <a:spcAft>
-                <a:spcPts val="1000"/>
+                <a:spcPts val="1100"/>
               </a:spcAft>
             </a:pPr>
             <a:r>
               <a:rPr sz="1600" b="1" i="0">
                 <a:solidFill>
-                  <a:srgbClr val="2E3A80"/>
-                </a:solidFill>
-                <a:latin typeface="Montserrat"/>
-              </a:rPr>
-              <a:t>•  </a:t>
+                  <a:srgbClr val="E8801A"/>
+                </a:solidFill>
+                <a:latin typeface="Montserrat"/>
+              </a:rPr>
+              <a:t>▸  </a:t>
             </a:r>
             <a:r>
               <a:rPr sz="1600" b="0" i="0">
@@ -7906,17 +8258,17 @@
           <a:p>
             <a:pPr>
               <a:spcAft>
-                <a:spcPts val="1000"/>
+                <a:spcPts val="1100"/>
               </a:spcAft>
             </a:pPr>
             <a:r>
               <a:rPr sz="1600" b="1" i="0">
                 <a:solidFill>
-                  <a:srgbClr val="2E3A80"/>
-                </a:solidFill>
-                <a:latin typeface="Montserrat"/>
-              </a:rPr>
-              <a:t>•  </a:t>
+                  <a:srgbClr val="E8801A"/>
+                </a:solidFill>
+                <a:latin typeface="Montserrat"/>
+              </a:rPr>
+              <a:t>▸  </a:t>
             </a:r>
             <a:r>
               <a:rPr sz="1600" b="0" i="0">
@@ -7931,17 +8283,17 @@
           <a:p>
             <a:pPr>
               <a:spcAft>
-                <a:spcPts val="1000"/>
+                <a:spcPts val="1100"/>
               </a:spcAft>
             </a:pPr>
             <a:r>
               <a:rPr sz="1600" b="1" i="0">
                 <a:solidFill>
-                  <a:srgbClr val="2E3A80"/>
-                </a:solidFill>
-                <a:latin typeface="Montserrat"/>
-              </a:rPr>
-              <a:t>•  </a:t>
+                  <a:srgbClr val="E8801A"/>
+                </a:solidFill>
+                <a:latin typeface="Montserrat"/>
+              </a:rPr>
+              <a:t>▸  </a:t>
             </a:r>
             <a:r>
               <a:rPr sz="1600" b="0" i="0">
@@ -7956,17 +8308,17 @@
           <a:p>
             <a:pPr>
               <a:spcAft>
-                <a:spcPts val="1000"/>
+                <a:spcPts val="1100"/>
               </a:spcAft>
             </a:pPr>
             <a:r>
               <a:rPr sz="1600" b="1" i="0">
                 <a:solidFill>
-                  <a:srgbClr val="2E3A80"/>
-                </a:solidFill>
-                <a:latin typeface="Montserrat"/>
-              </a:rPr>
-              <a:t>•  </a:t>
+                  <a:srgbClr val="E8801A"/>
+                </a:solidFill>
+                <a:latin typeface="Montserrat"/>
+              </a:rPr>
+              <a:t>▸  </a:t>
             </a:r>
             <a:r>
               <a:rPr sz="1600" b="0" i="0">
@@ -7982,7 +8334,7 @@
       </p:sp>
       <p:sp>
         <p:nvSpPr>
-          <p:cNvPr id="8" name="imgph" descr="IMGQ:cracked wall interior meter room inspection"/>
+          <p:cNvPr id="9" name="imgph" descr="IMGQ:cracked wall interior meter room inspection"/>
           <p:cNvSpPr/>
           <p:nvPr/>
         </p:nvSpPr>
@@ -8028,7 +8380,7 @@
       </p:sp>
       <p:sp>
         <p:nvSpPr>
-          <p:cNvPr id="9" name="TextBox 8"/>
+          <p:cNvPr id="10" name="TextBox 9"/>
           <p:cNvSpPr txBox="1"/>
           <p:nvPr/>
         </p:nvSpPr>
@@ -8213,7 +8565,7 @@
         <p:spPr>
           <a:xfrm>
             <a:off x="822960" y="457200"/>
-            <a:ext cx="8229600" cy="365760"/>
+            <a:ext cx="10058400" cy="365760"/>
           </a:xfrm>
           <a:prstGeom prst="rect">
             <a:avLst/>
@@ -8227,9 +8579,9 @@
           <a:lstStyle/>
           <a:p>
             <a:r>
-              <a:rPr sz="1200" b="1" i="0">
-                <a:solidFill>
-                  <a:srgbClr val="64748B"/>
+              <a:rPr sz="1300" b="1" i="0">
+                <a:solidFill>
+                  <a:srgbClr val="E8801A"/>
                 </a:solidFill>
                 <a:latin typeface="Montserrat"/>
               </a:rPr>
@@ -8261,7 +8613,7 @@
           <a:lstStyle/>
           <a:p>
             <a:r>
-              <a:rPr sz="2700" b="1" i="0">
+              <a:rPr sz="2800" b="1" i="0">
                 <a:solidFill>
                   <a:srgbClr val="1E2761"/>
                 </a:solidFill>
@@ -8274,13 +8626,57 @@
       </p:sp>
       <p:sp>
         <p:nvSpPr>
-          <p:cNvPr id="7" name="TextBox 6"/>
+          <p:cNvPr id="7" name="Rounded Rectangle 6"/>
+          <p:cNvSpPr/>
+          <p:nvPr/>
+        </p:nvSpPr>
+        <p:spPr>
+          <a:xfrm>
+            <a:off x="868680" y="1627632"/>
+            <a:ext cx="2011680" cy="73152"/>
+          </a:xfrm>
+          <a:prstGeom prst="roundRect">
+            <a:avLst/>
+          </a:prstGeom>
+          <a:solidFill>
+            <a:srgbClr val="E8801A"/>
+          </a:solidFill>
+          <a:ln>
+            <a:noFill/>
+          </a:ln>
+          <a:effectLst/>
+        </p:spPr>
+        <p:style>
+          <a:lnRef idx="1">
+            <a:schemeClr val="accent1"/>
+          </a:lnRef>
+          <a:fillRef idx="3">
+            <a:schemeClr val="accent1"/>
+          </a:fillRef>
+          <a:effectRef idx="2">
+            <a:schemeClr val="accent1"/>
+          </a:effectRef>
+          <a:fontRef idx="minor">
+            <a:schemeClr val="lt1"/>
+          </a:fontRef>
+        </p:style>
+        <p:txBody>
+          <a:bodyPr rtlCol="0" anchor="ctr"/>
+          <a:lstStyle/>
+          <a:p>
+            <a:pPr algn="ctr"/>
+          </a:p>
+        </p:txBody>
+      </p:sp>
+      <p:sp>
+        <p:nvSpPr>
+          <p:cNvPr id="8" name="TextBox 7"/>
           <p:cNvSpPr txBox="1"/>
           <p:nvPr/>
         </p:nvSpPr>
         <p:spPr>
           <a:xfrm>
-            <a:off x="822960" y="1920240"/>
+            <a:off x="822960" y="1965960"/>
             <a:ext cx="4983480" cy="4206240"/>
           </a:xfrm>
           <a:prstGeom prst="rect">
@@ -8296,17 +8692,17 @@
           <a:p>
             <a:pPr>
               <a:spcAft>
-                <a:spcPts val="1000"/>
+                <a:spcPts val="1100"/>
               </a:spcAft>
             </a:pPr>
             <a:r>
               <a:rPr sz="1600" b="1" i="0">
                 <a:solidFill>
-                  <a:srgbClr val="2E3A80"/>
-                </a:solidFill>
-                <a:latin typeface="Montserrat"/>
-              </a:rPr>
-              <a:t>•  </a:t>
+                  <a:srgbClr val="E8801A"/>
+                </a:solidFill>
+                <a:latin typeface="Montserrat"/>
+              </a:rPr>
+              <a:t>▸  </a:t>
             </a:r>
             <a:r>
               <a:rPr sz="1600" b="0" i="0">
@@ -8321,17 +8717,17 @@
           <a:p>
             <a:pPr>
               <a:spcAft>
-                <a:spcPts val="1000"/>
+                <a:spcPts val="1100"/>
               </a:spcAft>
             </a:pPr>
             <a:r>
               <a:rPr sz="1600" b="1" i="0">
                 <a:solidFill>
-                  <a:srgbClr val="2E3A80"/>
-                </a:solidFill>
-                <a:latin typeface="Montserrat"/>
-              </a:rPr>
-              <a:t>•  </a:t>
+                  <a:srgbClr val="E8801A"/>
+                </a:solidFill>
+                <a:latin typeface="Montserrat"/>
+              </a:rPr>
+              <a:t>▸  </a:t>
             </a:r>
             <a:r>
               <a:rPr sz="1600" b="0" i="0">
@@ -8346,17 +8742,17 @@
           <a:p>
             <a:pPr>
               <a:spcAft>
-                <a:spcPts val="1000"/>
+                <a:spcPts val="1100"/>
               </a:spcAft>
             </a:pPr>
             <a:r>
               <a:rPr sz="1600" b="1" i="0">
                 <a:solidFill>
-                  <a:srgbClr val="2E3A80"/>
-                </a:solidFill>
-                <a:latin typeface="Montserrat"/>
-              </a:rPr>
-              <a:t>•  </a:t>
+                  <a:srgbClr val="E8801A"/>
+                </a:solidFill>
+                <a:latin typeface="Montserrat"/>
+              </a:rPr>
+              <a:t>▸  </a:t>
             </a:r>
             <a:r>
               <a:rPr sz="1600" b="0" i="0">
@@ -8372,7 +8768,7 @@
       </p:sp>
       <p:sp>
         <p:nvSpPr>
-          <p:cNvPr id="8" name="imgph" descr="IMGQ:gas meters labeled identification tags building"/>
+          <p:cNvPr id="9" name="imgph" descr="IMGQ:gas meters labeled identification tags building"/>
           <p:cNvSpPr/>
           <p:nvPr/>
         </p:nvSpPr>
@@ -8418,7 +8814,7 @@
       </p:sp>
       <p:sp>
         <p:nvSpPr>
-          <p:cNvPr id="9" name="TextBox 8"/>
+          <p:cNvPr id="10" name="TextBox 9"/>
           <p:cNvSpPr txBox="1"/>
           <p:nvPr/>
         </p:nvSpPr>
@@ -8603,7 +8999,7 @@
         <p:spPr>
           <a:xfrm>
             <a:off x="822960" y="457200"/>
-            <a:ext cx="8229600" cy="365760"/>
+            <a:ext cx="10058400" cy="365760"/>
           </a:xfrm>
           <a:prstGeom prst="rect">
             <a:avLst/>
@@ -8617,9 +9013,9 @@
           <a:lstStyle/>
           <a:p>
             <a:r>
-              <a:rPr sz="1200" b="1" i="0">
-                <a:solidFill>
-                  <a:srgbClr val="64748B"/>
+              <a:rPr sz="1300" b="1" i="0">
+                <a:solidFill>
+                  <a:srgbClr val="E8801A"/>
                 </a:solidFill>
                 <a:latin typeface="Montserrat"/>
               </a:rPr>
@@ -8651,7 +9047,7 @@
           <a:lstStyle/>
           <a:p>
             <a:r>
-              <a:rPr sz="2700" b="1" i="0">
+              <a:rPr sz="2800" b="1" i="0">
                 <a:solidFill>
                   <a:srgbClr val="1E2761"/>
                 </a:solidFill>
@@ -8664,13 +9060,57 @@
       </p:sp>
       <p:sp>
         <p:nvSpPr>
-          <p:cNvPr id="7" name="TextBox 6"/>
+          <p:cNvPr id="7" name="Rounded Rectangle 6"/>
+          <p:cNvSpPr/>
+          <p:nvPr/>
+        </p:nvSpPr>
+        <p:spPr>
+          <a:xfrm>
+            <a:off x="868680" y="1627632"/>
+            <a:ext cx="2011680" cy="73152"/>
+          </a:xfrm>
+          <a:prstGeom prst="roundRect">
+            <a:avLst/>
+          </a:prstGeom>
+          <a:solidFill>
+            <a:srgbClr val="E8801A"/>
+          </a:solidFill>
+          <a:ln>
+            <a:noFill/>
+          </a:ln>
+          <a:effectLst/>
+        </p:spPr>
+        <p:style>
+          <a:lnRef idx="1">
+            <a:schemeClr val="accent1"/>
+          </a:lnRef>
+          <a:fillRef idx="3">
+            <a:schemeClr val="accent1"/>
+          </a:fillRef>
+          <a:effectRef idx="2">
+            <a:schemeClr val="accent1"/>
+          </a:effectRef>
+          <a:fontRef idx="minor">
+            <a:schemeClr val="lt1"/>
+          </a:fontRef>
+        </p:style>
+        <p:txBody>
+          <a:bodyPr rtlCol="0" anchor="ctr"/>
+          <a:lstStyle/>
+          <a:p>
+            <a:pPr algn="ctr"/>
+          </a:p>
+        </p:txBody>
+      </p:sp>
+      <p:sp>
+        <p:nvSpPr>
+          <p:cNvPr id="8" name="TextBox 7"/>
           <p:cNvSpPr txBox="1"/>
           <p:nvPr/>
         </p:nvSpPr>
         <p:spPr>
           <a:xfrm>
-            <a:off x="822960" y="1920240"/>
+            <a:off x="822960" y="1965960"/>
             <a:ext cx="4983480" cy="4206240"/>
           </a:xfrm>
           <a:prstGeom prst="rect">
@@ -8686,17 +9126,17 @@
           <a:p>
             <a:pPr>
               <a:spcAft>
-                <a:spcPts val="1000"/>
+                <a:spcPts val="1100"/>
               </a:spcAft>
             </a:pPr>
             <a:r>
               <a:rPr sz="1600" b="1" i="0">
                 <a:solidFill>
-                  <a:srgbClr val="2E3A80"/>
-                </a:solidFill>
-                <a:latin typeface="Montserrat"/>
-              </a:rPr>
-              <a:t>•  </a:t>
+                  <a:srgbClr val="E8801A"/>
+                </a:solidFill>
+                <a:latin typeface="Montserrat"/>
+              </a:rPr>
+              <a:t>▸  </a:t>
             </a:r>
             <a:r>
               <a:rPr sz="1600" b="0" i="0">
@@ -8711,17 +9151,17 @@
           <a:p>
             <a:pPr>
               <a:spcAft>
-                <a:spcPts val="1000"/>
+                <a:spcPts val="1100"/>
               </a:spcAft>
             </a:pPr>
             <a:r>
               <a:rPr sz="1600" b="1" i="0">
                 <a:solidFill>
-                  <a:srgbClr val="2E3A80"/>
-                </a:solidFill>
-                <a:latin typeface="Montserrat"/>
-              </a:rPr>
-              <a:t>•  </a:t>
+                  <a:srgbClr val="E8801A"/>
+                </a:solidFill>
+                <a:latin typeface="Montserrat"/>
+              </a:rPr>
+              <a:t>▸  </a:t>
             </a:r>
             <a:r>
               <a:rPr sz="1600" b="0" i="0">
@@ -8736,17 +9176,17 @@
           <a:p>
             <a:pPr>
               <a:spcAft>
-                <a:spcPts val="1000"/>
+                <a:spcPts val="1100"/>
               </a:spcAft>
             </a:pPr>
             <a:r>
               <a:rPr sz="1600" b="1" i="0">
                 <a:solidFill>
-                  <a:srgbClr val="2E3A80"/>
-                </a:solidFill>
-                <a:latin typeface="Montserrat"/>
-              </a:rPr>
-              <a:t>•  </a:t>
+                  <a:srgbClr val="E8801A"/>
+                </a:solidFill>
+                <a:latin typeface="Montserrat"/>
+              </a:rPr>
+              <a:t>▸  </a:t>
             </a:r>
             <a:r>
               <a:rPr sz="1600" b="0" i="0">
@@ -8762,7 +9202,7 @@
       </p:sp>
       <p:sp>
         <p:nvSpPr>
-          <p:cNvPr id="8" name="imgph" descr="IMGQ:inspection report clipboard gas installation"/>
+          <p:cNvPr id="9" name="imgph" descr="IMGQ:inspection report clipboard gas installation"/>
           <p:cNvSpPr/>
           <p:nvPr/>
         </p:nvSpPr>
@@ -8808,7 +9248,7 @@
       </p:sp>
       <p:sp>
         <p:nvSpPr>
-          <p:cNvPr id="9" name="TextBox 8"/>
+          <p:cNvPr id="10" name="TextBox 9"/>
           <p:cNvSpPr txBox="1"/>
           <p:nvPr/>
         </p:nvSpPr>
@@ -8940,7 +9380,7 @@
             <a:r>
               <a:rPr sz="1400" b="1" i="0">
                 <a:solidFill>
-                  <a:srgbClr val="CADCFC"/>
+                  <a:srgbClr val="F4A24C"/>
                 </a:solidFill>
                 <a:latin typeface="Montserrat"/>
               </a:rPr>
@@ -8951,13 +9391,57 @@
       </p:sp>
       <p:sp>
         <p:nvSpPr>
-          <p:cNvPr id="4" name="TextBox 3"/>
+          <p:cNvPr id="4" name="Rounded Rectangle 3"/>
+          <p:cNvSpPr/>
+          <p:nvPr/>
+        </p:nvSpPr>
+        <p:spPr>
+          <a:xfrm>
+            <a:off x="868680" y="1051560"/>
+            <a:ext cx="1463040" cy="82296"/>
+          </a:xfrm>
+          <a:prstGeom prst="roundRect">
+            <a:avLst/>
+          </a:prstGeom>
+          <a:solidFill>
+            <a:srgbClr val="E8801A"/>
+          </a:solidFill>
+          <a:ln>
+            <a:noFill/>
+          </a:ln>
+          <a:effectLst/>
+        </p:spPr>
+        <p:style>
+          <a:lnRef idx="1">
+            <a:schemeClr val="accent1"/>
+          </a:lnRef>
+          <a:fillRef idx="3">
+            <a:schemeClr val="accent1"/>
+          </a:fillRef>
+          <a:effectRef idx="2">
+            <a:schemeClr val="accent1"/>
+          </a:effectRef>
+          <a:fontRef idx="minor">
+            <a:schemeClr val="lt1"/>
+          </a:fontRef>
+        </p:style>
+        <p:txBody>
+          <a:bodyPr rtlCol="0" anchor="ctr"/>
+          <a:lstStyle/>
+          <a:p>
+            <a:pPr algn="ctr"/>
+          </a:p>
+        </p:txBody>
+      </p:sp>
+      <p:sp>
+        <p:nvSpPr>
+          <p:cNvPr id="5" name="TextBox 4"/>
           <p:cNvSpPr txBox="1"/>
           <p:nvPr/>
         </p:nvSpPr>
         <p:spPr>
           <a:xfrm>
-            <a:off x="822960" y="1143000"/>
+            <a:off x="822960" y="1234440"/>
             <a:ext cx="10515600" cy="1097280"/>
           </a:xfrm>
           <a:prstGeom prst="rect">
@@ -8985,14 +9469,14 @@
       </p:sp>
       <p:sp>
         <p:nvSpPr>
-          <p:cNvPr id="5" name="TextBox 4"/>
+          <p:cNvPr id="6" name="TextBox 5"/>
           <p:cNvSpPr txBox="1"/>
           <p:nvPr/>
         </p:nvSpPr>
         <p:spPr>
           <a:xfrm>
-            <a:off x="822960" y="2514600"/>
-            <a:ext cx="10515600" cy="2834640"/>
+            <a:off x="822960" y="2606040"/>
+            <a:ext cx="10515600" cy="2743200"/>
           </a:xfrm>
           <a:prstGeom prst="rect">
             <a:avLst/>
@@ -9013,7 +9497,7 @@
             <a:r>
               <a:rPr sz="2000" b="1" i="0">
                 <a:solidFill>
-                  <a:srgbClr val="CADCFC"/>
+                  <a:srgbClr val="F4A24C"/>
                 </a:solidFill>
                 <a:latin typeface="Montserrat"/>
               </a:rPr>
@@ -9038,7 +9522,7 @@
             <a:r>
               <a:rPr sz="2000" b="1" i="0">
                 <a:solidFill>
-                  <a:srgbClr val="CADCFC"/>
+                  <a:srgbClr val="F4A24C"/>
                 </a:solidFill>
                 <a:latin typeface="Montserrat"/>
               </a:rPr>
@@ -9063,7 +9547,7 @@
             <a:r>
               <a:rPr sz="2000" b="1" i="0">
                 <a:solidFill>
-                  <a:srgbClr val="CADCFC"/>
+                  <a:srgbClr val="F4A24C"/>
                 </a:solidFill>
                 <a:latin typeface="Montserrat"/>
               </a:rPr>
@@ -9088,7 +9572,7 @@
             <a:r>
               <a:rPr sz="2000" b="1" i="0">
                 <a:solidFill>
-                  <a:srgbClr val="CADCFC"/>
+                  <a:srgbClr val="F4A24C"/>
                 </a:solidFill>
                 <a:latin typeface="Montserrat"/>
               </a:rPr>
@@ -9108,20 +9592,20 @@
       </p:sp>
       <p:sp>
         <p:nvSpPr>
-          <p:cNvPr id="6" name="Rounded Rectangle 5"/>
+          <p:cNvPr id="7" name="Rounded Rectangle 6"/>
           <p:cNvSpPr/>
           <p:nvPr/>
         </p:nvSpPr>
         <p:spPr>
           <a:xfrm>
             <a:off x="822960" y="5532120"/>
-            <a:ext cx="10515600" cy="777240"/>
+            <a:ext cx="10515600" cy="822960"/>
           </a:xfrm>
           <a:prstGeom prst="roundRect">
             <a:avLst/>
           </a:prstGeom>
           <a:solidFill>
-            <a:srgbClr val="2E3A80"/>
+            <a:srgbClr val="E8801A"/>
           </a:solidFill>
           <a:ln>
             <a:noFill/>
@@ -9152,13 +9636,13 @@
       </p:sp>
       <p:sp>
         <p:nvSpPr>
-          <p:cNvPr id="7" name="TextBox 6"/>
+          <p:cNvPr id="8" name="TextBox 7"/>
           <p:cNvSpPr txBox="1"/>
           <p:nvPr/>
         </p:nvSpPr>
         <p:spPr>
           <a:xfrm>
-            <a:off x="1051560" y="5605272"/>
+            <a:off x="1051560" y="5623560"/>
             <a:ext cx="10058400" cy="640080"/>
           </a:xfrm>
           <a:prstGeom prst="rect">
@@ -9175,7 +9659,7 @@
             <a:r>
               <a:rPr sz="1500" b="1" i="1">
                 <a:solidFill>
-                  <a:srgbClr val="CADCFC"/>
+                  <a:srgbClr val="1E2761"/>
                 </a:solidFill>
                 <a:latin typeface="Montserrat"/>
               </a:rPr>
@@ -9340,7 +9824,7 @@
             <a:r>
               <a:rPr sz="2700" b="1" i="0">
                 <a:solidFill>
-                  <a:srgbClr val="1E2761"/>
+                  <a:srgbClr val="E8801A"/>
                 </a:solidFill>
                 <a:latin typeface="Montserrat"/>
               </a:rPr>
@@ -9352,6 +9836,50 @@
       <p:sp>
         <p:nvSpPr>
           <p:cNvPr id="6" name="Rounded Rectangle 5"/>
+          <p:cNvSpPr/>
+          <p:nvPr/>
+        </p:nvSpPr>
+        <p:spPr>
+          <a:xfrm>
+            <a:off x="868680" y="1234440"/>
+            <a:ext cx="1463040" cy="73152"/>
+          </a:xfrm>
+          <a:prstGeom prst="roundRect">
+            <a:avLst/>
+          </a:prstGeom>
+          <a:solidFill>
+            <a:srgbClr val="1E2761"/>
+          </a:solidFill>
+          <a:ln>
+            <a:noFill/>
+          </a:ln>
+          <a:effectLst/>
+        </p:spPr>
+        <p:style>
+          <a:lnRef idx="1">
+            <a:schemeClr val="accent1"/>
+          </a:lnRef>
+          <a:fillRef idx="3">
+            <a:schemeClr val="accent1"/>
+          </a:fillRef>
+          <a:effectRef idx="2">
+            <a:schemeClr val="accent1"/>
+          </a:effectRef>
+          <a:fontRef idx="minor">
+            <a:schemeClr val="lt1"/>
+          </a:fontRef>
+        </p:style>
+        <p:txBody>
+          <a:bodyPr rtlCol="0" anchor="ctr"/>
+          <a:lstStyle/>
+          <a:p>
+            <a:pPr algn="ctr"/>
+          </a:p>
+        </p:txBody>
+      </p:sp>
+      <p:sp>
+        <p:nvSpPr>
+          <p:cNvPr id="7" name="Rounded Rectangle 6"/>
           <p:cNvSpPr/>
           <p:nvPr/>
         </p:nvSpPr>
@@ -9397,7 +9925,7 @@
       </p:sp>
       <p:sp>
         <p:nvSpPr>
-          <p:cNvPr id="7" name="TextBox 6"/>
+          <p:cNvPr id="8" name="TextBox 7"/>
           <p:cNvSpPr txBox="1"/>
           <p:nvPr/>
         </p:nvSpPr>
@@ -9432,7 +9960,7 @@
       </p:sp>
       <p:sp>
         <p:nvSpPr>
-          <p:cNvPr id="8" name="TextBox 7"/>
+          <p:cNvPr id="9" name="TextBox 8"/>
           <p:cNvSpPr txBox="1"/>
           <p:nvPr/>
         </p:nvSpPr>
@@ -9467,7 +9995,7 @@
       </p:sp>
       <p:sp>
         <p:nvSpPr>
-          <p:cNvPr id="9" name="Rounded Rectangle 8"/>
+          <p:cNvPr id="10" name="Rounded Rectangle 9"/>
           <p:cNvSpPr/>
           <p:nvPr/>
         </p:nvSpPr>
@@ -9513,7 +10041,7 @@
       </p:sp>
       <p:sp>
         <p:nvSpPr>
-          <p:cNvPr id="10" name="TextBox 9"/>
+          <p:cNvPr id="11" name="TextBox 10"/>
           <p:cNvSpPr txBox="1"/>
           <p:nvPr/>
         </p:nvSpPr>
@@ -9548,7 +10076,7 @@
       </p:sp>
       <p:sp>
         <p:nvSpPr>
-          <p:cNvPr id="11" name="TextBox 10"/>
+          <p:cNvPr id="12" name="TextBox 11"/>
           <p:cNvSpPr txBox="1"/>
           <p:nvPr/>
         </p:nvSpPr>
@@ -9583,7 +10111,7 @@
       </p:sp>
       <p:sp>
         <p:nvSpPr>
-          <p:cNvPr id="12" name="Rounded Rectangle 11"/>
+          <p:cNvPr id="13" name="Rounded Rectangle 12"/>
           <p:cNvSpPr/>
           <p:nvPr/>
         </p:nvSpPr>
@@ -9629,7 +10157,7 @@
       </p:sp>
       <p:sp>
         <p:nvSpPr>
-          <p:cNvPr id="13" name="TextBox 12"/>
+          <p:cNvPr id="14" name="TextBox 13"/>
           <p:cNvSpPr txBox="1"/>
           <p:nvPr/>
         </p:nvSpPr>
@@ -9664,7 +10192,7 @@
       </p:sp>
       <p:sp>
         <p:nvSpPr>
-          <p:cNvPr id="14" name="TextBox 13"/>
+          <p:cNvPr id="15" name="TextBox 14"/>
           <p:cNvSpPr txBox="1"/>
           <p:nvPr/>
         </p:nvSpPr>
@@ -9837,7 +10365,7 @@
         <p:spPr>
           <a:xfrm>
             <a:off x="822960" y="457200"/>
-            <a:ext cx="8229600" cy="365760"/>
+            <a:ext cx="10058400" cy="365760"/>
           </a:xfrm>
           <a:prstGeom prst="rect">
             <a:avLst/>
@@ -9851,9 +10379,9 @@
           <a:lstStyle/>
           <a:p>
             <a:r>
-              <a:rPr sz="1200" b="1" i="0">
-                <a:solidFill>
-                  <a:srgbClr val="64748B"/>
+              <a:rPr sz="1300" b="1" i="0">
+                <a:solidFill>
+                  <a:srgbClr val="E8801A"/>
                 </a:solidFill>
                 <a:latin typeface="Montserrat"/>
               </a:rPr>
@@ -9885,7 +10413,7 @@
           <a:lstStyle/>
           <a:p>
             <a:r>
-              <a:rPr sz="2700" b="1" i="0">
+              <a:rPr sz="2800" b="1" i="0">
                 <a:solidFill>
                   <a:srgbClr val="1E2761"/>
                 </a:solidFill>
@@ -9898,13 +10426,57 @@
       </p:sp>
       <p:sp>
         <p:nvSpPr>
-          <p:cNvPr id="7" name="TextBox 6"/>
+          <p:cNvPr id="7" name="Rounded Rectangle 6"/>
+          <p:cNvSpPr/>
+          <p:nvPr/>
+        </p:nvSpPr>
+        <p:spPr>
+          <a:xfrm>
+            <a:off x="868680" y="1627632"/>
+            <a:ext cx="2011680" cy="73152"/>
+          </a:xfrm>
+          <a:prstGeom prst="roundRect">
+            <a:avLst/>
+          </a:prstGeom>
+          <a:solidFill>
+            <a:srgbClr val="E8801A"/>
+          </a:solidFill>
+          <a:ln>
+            <a:noFill/>
+          </a:ln>
+          <a:effectLst/>
+        </p:spPr>
+        <p:style>
+          <a:lnRef idx="1">
+            <a:schemeClr val="accent1"/>
+          </a:lnRef>
+          <a:fillRef idx="3">
+            <a:schemeClr val="accent1"/>
+          </a:fillRef>
+          <a:effectRef idx="2">
+            <a:schemeClr val="accent1"/>
+          </a:effectRef>
+          <a:fontRef idx="minor">
+            <a:schemeClr val="lt1"/>
+          </a:fontRef>
+        </p:style>
+        <p:txBody>
+          <a:bodyPr rtlCol="0" anchor="ctr"/>
+          <a:lstStyle/>
+          <a:p>
+            <a:pPr algn="ctr"/>
+          </a:p>
+        </p:txBody>
+      </p:sp>
+      <p:sp>
+        <p:nvSpPr>
+          <p:cNvPr id="8" name="TextBox 7"/>
           <p:cNvSpPr txBox="1"/>
           <p:nvPr/>
         </p:nvSpPr>
         <p:spPr>
           <a:xfrm>
-            <a:off x="822960" y="1920240"/>
+            <a:off x="822960" y="1965960"/>
             <a:ext cx="4983480" cy="4206240"/>
           </a:xfrm>
           <a:prstGeom prst="rect">
@@ -9920,17 +10492,17 @@
           <a:p>
             <a:pPr>
               <a:spcAft>
-                <a:spcPts val="1000"/>
+                <a:spcPts val="1100"/>
               </a:spcAft>
             </a:pPr>
             <a:r>
               <a:rPr sz="1600" b="1" i="0">
                 <a:solidFill>
-                  <a:srgbClr val="2E3A80"/>
-                </a:solidFill>
-                <a:latin typeface="Montserrat"/>
-              </a:rPr>
-              <a:t>•  </a:t>
+                  <a:srgbClr val="E8801A"/>
+                </a:solidFill>
+                <a:latin typeface="Montserrat"/>
+              </a:rPr>
+              <a:t>▸  </a:t>
             </a:r>
             <a:r>
               <a:rPr sz="1600" b="0" i="0">
@@ -9945,17 +10517,17 @@
           <a:p>
             <a:pPr>
               <a:spcAft>
-                <a:spcPts val="1000"/>
+                <a:spcPts val="1100"/>
               </a:spcAft>
             </a:pPr>
             <a:r>
               <a:rPr sz="1600" b="1" i="0">
                 <a:solidFill>
-                  <a:srgbClr val="2E3A80"/>
-                </a:solidFill>
-                <a:latin typeface="Montserrat"/>
-              </a:rPr>
-              <a:t>•  </a:t>
+                  <a:srgbClr val="E8801A"/>
+                </a:solidFill>
+                <a:latin typeface="Montserrat"/>
+              </a:rPr>
+              <a:t>▸  </a:t>
             </a:r>
             <a:r>
               <a:rPr sz="1600" b="0" i="0">
@@ -9970,17 +10542,17 @@
           <a:p>
             <a:pPr>
               <a:spcAft>
-                <a:spcPts val="1000"/>
+                <a:spcPts val="1100"/>
               </a:spcAft>
             </a:pPr>
             <a:r>
               <a:rPr sz="1600" b="1" i="0">
                 <a:solidFill>
-                  <a:srgbClr val="2E3A80"/>
-                </a:solidFill>
-                <a:latin typeface="Montserrat"/>
-              </a:rPr>
-              <a:t>•  </a:t>
+                  <a:srgbClr val="E8801A"/>
+                </a:solidFill>
+                <a:latin typeface="Montserrat"/>
+              </a:rPr>
+              <a:t>▸  </a:t>
             </a:r>
             <a:r>
               <a:rPr sz="1600" b="0" i="0">
@@ -9996,7 +10568,7 @@
       </p:sp>
       <p:sp>
         <p:nvSpPr>
-          <p:cNvPr id="8" name="imgph" descr="IMGQ:gas pressure regulation station industrial cabinet"/>
+          <p:cNvPr id="9" name="imgph" descr="IMGQ:gas pressure regulation station industrial cabinet"/>
           <p:cNvSpPr/>
           <p:nvPr/>
         </p:nvSpPr>
@@ -10042,7 +10614,7 @@
       </p:sp>
       <p:sp>
         <p:nvSpPr>
-          <p:cNvPr id="9" name="TextBox 8"/>
+          <p:cNvPr id="10" name="TextBox 9"/>
           <p:cNvSpPr txBox="1"/>
           <p:nvPr/>
         </p:nvSpPr>
@@ -10227,7 +10799,7 @@
         <p:spPr>
           <a:xfrm>
             <a:off x="822960" y="457200"/>
-            <a:ext cx="8229600" cy="365760"/>
+            <a:ext cx="10058400" cy="365760"/>
           </a:xfrm>
           <a:prstGeom prst="rect">
             <a:avLst/>
@@ -10241,9 +10813,9 @@
           <a:lstStyle/>
           <a:p>
             <a:r>
-              <a:rPr sz="1200" b="1" i="0">
-                <a:solidFill>
-                  <a:srgbClr val="64748B"/>
+              <a:rPr sz="1300" b="1" i="0">
+                <a:solidFill>
+                  <a:srgbClr val="E8801A"/>
                 </a:solidFill>
                 <a:latin typeface="Montserrat"/>
               </a:rPr>
@@ -10275,7 +10847,7 @@
           <a:lstStyle/>
           <a:p>
             <a:r>
-              <a:rPr sz="2700" b="1" i="0">
+              <a:rPr sz="2800" b="1" i="0">
                 <a:solidFill>
                   <a:srgbClr val="1E2761"/>
                 </a:solidFill>
@@ -10288,13 +10860,57 @@
       </p:sp>
       <p:sp>
         <p:nvSpPr>
-          <p:cNvPr id="7" name="TextBox 6"/>
+          <p:cNvPr id="7" name="Rounded Rectangle 6"/>
+          <p:cNvSpPr/>
+          <p:nvPr/>
+        </p:nvSpPr>
+        <p:spPr>
+          <a:xfrm>
+            <a:off x="868680" y="1627632"/>
+            <a:ext cx="2011680" cy="73152"/>
+          </a:xfrm>
+          <a:prstGeom prst="roundRect">
+            <a:avLst/>
+          </a:prstGeom>
+          <a:solidFill>
+            <a:srgbClr val="E8801A"/>
+          </a:solidFill>
+          <a:ln>
+            <a:noFill/>
+          </a:ln>
+          <a:effectLst/>
+        </p:spPr>
+        <p:style>
+          <a:lnRef idx="1">
+            <a:schemeClr val="accent1"/>
+          </a:lnRef>
+          <a:fillRef idx="3">
+            <a:schemeClr val="accent1"/>
+          </a:fillRef>
+          <a:effectRef idx="2">
+            <a:schemeClr val="accent1"/>
+          </a:effectRef>
+          <a:fontRef idx="minor">
+            <a:schemeClr val="lt1"/>
+          </a:fontRef>
+        </p:style>
+        <p:txBody>
+          <a:bodyPr rtlCol="0" anchor="ctr"/>
+          <a:lstStyle/>
+          <a:p>
+            <a:pPr algn="ctr"/>
+          </a:p>
+        </p:txBody>
+      </p:sp>
+      <p:sp>
+        <p:nvSpPr>
+          <p:cNvPr id="8" name="TextBox 7"/>
           <p:cNvSpPr txBox="1"/>
           <p:nvPr/>
         </p:nvSpPr>
         <p:spPr>
           <a:xfrm>
-            <a:off x="822960" y="1920240"/>
+            <a:off x="822960" y="1965960"/>
             <a:ext cx="4983480" cy="4206240"/>
           </a:xfrm>
           <a:prstGeom prst="rect">
@@ -10310,17 +10926,17 @@
           <a:p>
             <a:pPr>
               <a:spcAft>
-                <a:spcPts val="1000"/>
+                <a:spcPts val="1100"/>
               </a:spcAft>
             </a:pPr>
             <a:r>
               <a:rPr sz="1600" b="1" i="0">
                 <a:solidFill>
-                  <a:srgbClr val="2E3A80"/>
-                </a:solidFill>
-                <a:latin typeface="Montserrat"/>
-              </a:rPr>
-              <a:t>•  </a:t>
+                  <a:srgbClr val="E8801A"/>
+                </a:solidFill>
+                <a:latin typeface="Montserrat"/>
+              </a:rPr>
+              <a:t>▸  </a:t>
             </a:r>
             <a:r>
               <a:rPr sz="1600" b="0" i="0">
@@ -10335,17 +10951,17 @@
           <a:p>
             <a:pPr>
               <a:spcAft>
-                <a:spcPts val="1000"/>
+                <a:spcPts val="1100"/>
               </a:spcAft>
             </a:pPr>
             <a:r>
               <a:rPr sz="1600" b="1" i="0">
                 <a:solidFill>
-                  <a:srgbClr val="2E3A80"/>
-                </a:solidFill>
-                <a:latin typeface="Montserrat"/>
-              </a:rPr>
-              <a:t>•  </a:t>
+                  <a:srgbClr val="E8801A"/>
+                </a:solidFill>
+                <a:latin typeface="Montserrat"/>
+              </a:rPr>
+              <a:t>▸  </a:t>
             </a:r>
             <a:r>
               <a:rPr sz="1600" b="0" i="0">
@@ -10360,17 +10976,17 @@
           <a:p>
             <a:pPr>
               <a:spcAft>
-                <a:spcPts val="1000"/>
+                <a:spcPts val="1100"/>
               </a:spcAft>
             </a:pPr>
             <a:r>
               <a:rPr sz="1600" b="1" i="0">
                 <a:solidFill>
-                  <a:srgbClr val="2E3A80"/>
-                </a:solidFill>
-                <a:latin typeface="Montserrat"/>
-              </a:rPr>
-              <a:t>•  </a:t>
+                  <a:srgbClr val="E8801A"/>
+                </a:solidFill>
+                <a:latin typeface="Montserrat"/>
+              </a:rPr>
+              <a:t>▸  </a:t>
             </a:r>
             <a:r>
               <a:rPr sz="1600" b="0" i="0">
@@ -10385,17 +11001,17 @@
           <a:p>
             <a:pPr>
               <a:spcAft>
-                <a:spcPts val="1000"/>
+                <a:spcPts val="1100"/>
               </a:spcAft>
             </a:pPr>
             <a:r>
               <a:rPr sz="1600" b="1" i="0">
                 <a:solidFill>
-                  <a:srgbClr val="2E3A80"/>
-                </a:solidFill>
-                <a:latin typeface="Montserrat"/>
-              </a:rPr>
-              <a:t>•  </a:t>
+                  <a:srgbClr val="E8801A"/>
+                </a:solidFill>
+                <a:latin typeface="Montserrat"/>
+              </a:rPr>
+              <a:t>▸  </a:t>
             </a:r>
             <a:r>
               <a:rPr sz="1600" b="0" i="0">
@@ -10411,7 +11027,7 @@
       </p:sp>
       <p:sp>
         <p:nvSpPr>
-          <p:cNvPr id="8" name="imgph" descr="IMGQ:gas flow meter measurement device technician"/>
+          <p:cNvPr id="9" name="imgph" descr="IMGQ:gas flow meter measurement device technician"/>
           <p:cNvSpPr/>
           <p:nvPr/>
         </p:nvSpPr>
@@ -10457,7 +11073,7 @@
       </p:sp>
       <p:sp>
         <p:nvSpPr>
-          <p:cNvPr id="9" name="TextBox 8"/>
+          <p:cNvPr id="10" name="TextBox 9"/>
           <p:cNvSpPr txBox="1"/>
           <p:nvPr/>
         </p:nvSpPr>
@@ -10642,7 +11258,7 @@
         <p:spPr>
           <a:xfrm>
             <a:off x="822960" y="457200"/>
-            <a:ext cx="8229600" cy="365760"/>
+            <a:ext cx="10058400" cy="365760"/>
           </a:xfrm>
           <a:prstGeom prst="rect">
             <a:avLst/>
@@ -10656,9 +11272,9 @@
           <a:lstStyle/>
           <a:p>
             <a:r>
-              <a:rPr sz="1200" b="1" i="0">
-                <a:solidFill>
-                  <a:srgbClr val="64748B"/>
+              <a:rPr sz="1300" b="1" i="0">
+                <a:solidFill>
+                  <a:srgbClr val="E8801A"/>
                 </a:solidFill>
                 <a:latin typeface="Montserrat"/>
               </a:rPr>
@@ -10690,7 +11306,7 @@
           <a:lstStyle/>
           <a:p>
             <a:r>
-              <a:rPr sz="2700" b="1" i="0">
+              <a:rPr sz="2800" b="1" i="0">
                 <a:solidFill>
                   <a:srgbClr val="1E2761"/>
                 </a:solidFill>
@@ -10703,13 +11319,57 @@
       </p:sp>
       <p:sp>
         <p:nvSpPr>
-          <p:cNvPr id="7" name="TextBox 6"/>
+          <p:cNvPr id="7" name="Rounded Rectangle 6"/>
+          <p:cNvSpPr/>
+          <p:nvPr/>
+        </p:nvSpPr>
+        <p:spPr>
+          <a:xfrm>
+            <a:off x="868680" y="1627632"/>
+            <a:ext cx="2011680" cy="73152"/>
+          </a:xfrm>
+          <a:prstGeom prst="roundRect">
+            <a:avLst/>
+          </a:prstGeom>
+          <a:solidFill>
+            <a:srgbClr val="E8801A"/>
+          </a:solidFill>
+          <a:ln>
+            <a:noFill/>
+          </a:ln>
+          <a:effectLst/>
+        </p:spPr>
+        <p:style>
+          <a:lnRef idx="1">
+            <a:schemeClr val="accent1"/>
+          </a:lnRef>
+          <a:fillRef idx="3">
+            <a:schemeClr val="accent1"/>
+          </a:fillRef>
+          <a:effectRef idx="2">
+            <a:schemeClr val="accent1"/>
+          </a:effectRef>
+          <a:fontRef idx="minor">
+            <a:schemeClr val="lt1"/>
+          </a:fontRef>
+        </p:style>
+        <p:txBody>
+          <a:bodyPr rtlCol="0" anchor="ctr"/>
+          <a:lstStyle/>
+          <a:p>
+            <a:pPr algn="ctr"/>
+          </a:p>
+        </p:txBody>
+      </p:sp>
+      <p:sp>
+        <p:nvSpPr>
+          <p:cNvPr id="8" name="TextBox 7"/>
           <p:cNvSpPr txBox="1"/>
           <p:nvPr/>
         </p:nvSpPr>
         <p:spPr>
           <a:xfrm>
-            <a:off x="822960" y="1920240"/>
+            <a:off x="822960" y="1965960"/>
             <a:ext cx="4983480" cy="4206240"/>
           </a:xfrm>
           <a:prstGeom prst="rect">
@@ -10725,17 +11385,17 @@
           <a:p>
             <a:pPr>
               <a:spcAft>
-                <a:spcPts val="1000"/>
+                <a:spcPts val="1100"/>
               </a:spcAft>
             </a:pPr>
             <a:r>
               <a:rPr sz="1600" b="1" i="0">
                 <a:solidFill>
-                  <a:srgbClr val="2E3A80"/>
-                </a:solidFill>
-                <a:latin typeface="Montserrat"/>
-              </a:rPr>
-              <a:t>•  </a:t>
+                  <a:srgbClr val="E8801A"/>
+                </a:solidFill>
+                <a:latin typeface="Montserrat"/>
+              </a:rPr>
+              <a:t>▸  </a:t>
             </a:r>
             <a:r>
               <a:rPr sz="1600" b="0" i="0">
@@ -10750,17 +11410,17 @@
           <a:p>
             <a:pPr>
               <a:spcAft>
-                <a:spcPts val="1000"/>
+                <a:spcPts val="1100"/>
               </a:spcAft>
             </a:pPr>
             <a:r>
               <a:rPr sz="1600" b="1" i="0">
                 <a:solidFill>
-                  <a:srgbClr val="2E3A80"/>
-                </a:solidFill>
-                <a:latin typeface="Montserrat"/>
-              </a:rPr>
-              <a:t>•  </a:t>
+                  <a:srgbClr val="E8801A"/>
+                </a:solidFill>
+                <a:latin typeface="Montserrat"/>
+              </a:rPr>
+              <a:t>▸  </a:t>
             </a:r>
             <a:r>
               <a:rPr sz="1600" b="0" i="0">
@@ -10775,17 +11435,17 @@
           <a:p>
             <a:pPr>
               <a:spcAft>
-                <a:spcPts val="1000"/>
+                <a:spcPts val="1100"/>
               </a:spcAft>
             </a:pPr>
             <a:r>
               <a:rPr sz="1600" b="1" i="0">
                 <a:solidFill>
-                  <a:srgbClr val="2E3A80"/>
-                </a:solidFill>
-                <a:latin typeface="Montserrat"/>
-              </a:rPr>
-              <a:t>•  </a:t>
+                  <a:srgbClr val="E8801A"/>
+                </a:solidFill>
+                <a:latin typeface="Montserrat"/>
+              </a:rPr>
+              <a:t>▸  </a:t>
             </a:r>
             <a:r>
               <a:rPr sz="1600" b="0" i="0">
@@ -10801,7 +11461,7 @@
       </p:sp>
       <p:sp>
         <p:nvSpPr>
-          <p:cNvPr id="8" name="imgph" descr="IMGQ:boiler room machinery gas installation"/>
+          <p:cNvPr id="9" name="imgph" descr="IMGQ:boiler room machinery gas installation"/>
           <p:cNvSpPr/>
           <p:nvPr/>
         </p:nvSpPr>
@@ -10847,7 +11507,7 @@
       </p:sp>
       <p:sp>
         <p:nvSpPr>
-          <p:cNvPr id="9" name="TextBox 8"/>
+          <p:cNvPr id="10" name="TextBox 9"/>
           <p:cNvSpPr txBox="1"/>
           <p:nvPr/>
         </p:nvSpPr>
@@ -11032,7 +11692,7 @@
         <p:spPr>
           <a:xfrm>
             <a:off x="822960" y="457200"/>
-            <a:ext cx="8229600" cy="365760"/>
+            <a:ext cx="10058400" cy="365760"/>
           </a:xfrm>
           <a:prstGeom prst="rect">
             <a:avLst/>
@@ -11046,9 +11706,9 @@
           <a:lstStyle/>
           <a:p>
             <a:r>
-              <a:rPr sz="1200" b="1" i="0">
-                <a:solidFill>
-                  <a:srgbClr val="64748B"/>
+              <a:rPr sz="1300" b="1" i="0">
+                <a:solidFill>
+                  <a:srgbClr val="E8801A"/>
                 </a:solidFill>
                 <a:latin typeface="Montserrat"/>
               </a:rPr>
@@ -11080,7 +11740,7 @@
           <a:lstStyle/>
           <a:p>
             <a:r>
-              <a:rPr sz="2700" b="1" i="0">
+              <a:rPr sz="2800" b="1" i="0">
                 <a:solidFill>
                   <a:srgbClr val="1E2761"/>
                 </a:solidFill>
@@ -11093,13 +11753,57 @@
       </p:sp>
       <p:sp>
         <p:nvSpPr>
-          <p:cNvPr id="7" name="TextBox 6"/>
+          <p:cNvPr id="7" name="Rounded Rectangle 6"/>
+          <p:cNvSpPr/>
+          <p:nvPr/>
+        </p:nvSpPr>
+        <p:spPr>
+          <a:xfrm>
+            <a:off x="868680" y="1627632"/>
+            <a:ext cx="2011680" cy="73152"/>
+          </a:xfrm>
+          <a:prstGeom prst="roundRect">
+            <a:avLst/>
+          </a:prstGeom>
+          <a:solidFill>
+            <a:srgbClr val="E8801A"/>
+          </a:solidFill>
+          <a:ln>
+            <a:noFill/>
+          </a:ln>
+          <a:effectLst/>
+        </p:spPr>
+        <p:style>
+          <a:lnRef idx="1">
+            <a:schemeClr val="accent1"/>
+          </a:lnRef>
+          <a:fillRef idx="3">
+            <a:schemeClr val="accent1"/>
+          </a:fillRef>
+          <a:effectRef idx="2">
+            <a:schemeClr val="accent1"/>
+          </a:effectRef>
+          <a:fontRef idx="minor">
+            <a:schemeClr val="lt1"/>
+          </a:fontRef>
+        </p:style>
+        <p:txBody>
+          <a:bodyPr rtlCol="0" anchor="ctr"/>
+          <a:lstStyle/>
+          <a:p>
+            <a:pPr algn="ctr"/>
+          </a:p>
+        </p:txBody>
+      </p:sp>
+      <p:sp>
+        <p:nvSpPr>
+          <p:cNvPr id="8" name="TextBox 7"/>
           <p:cNvSpPr txBox="1"/>
           <p:nvPr/>
         </p:nvSpPr>
         <p:spPr>
           <a:xfrm>
-            <a:off x="822960" y="1920240"/>
+            <a:off x="822960" y="1965960"/>
             <a:ext cx="4983480" cy="4206240"/>
           </a:xfrm>
           <a:prstGeom prst="rect">
@@ -11115,17 +11819,17 @@
           <a:p>
             <a:pPr>
               <a:spcAft>
-                <a:spcPts val="1000"/>
+                <a:spcPts val="1100"/>
               </a:spcAft>
             </a:pPr>
             <a:r>
               <a:rPr sz="1600" b="1" i="0">
                 <a:solidFill>
-                  <a:srgbClr val="2E3A80"/>
-                </a:solidFill>
-                <a:latin typeface="Montserrat"/>
-              </a:rPr>
-              <a:t>•  </a:t>
+                  <a:srgbClr val="E8801A"/>
+                </a:solidFill>
+                <a:latin typeface="Montserrat"/>
+              </a:rPr>
+              <a:t>▸  </a:t>
             </a:r>
             <a:r>
               <a:rPr sz="1600" b="0" i="0">
@@ -11140,17 +11844,17 @@
           <a:p>
             <a:pPr>
               <a:spcAft>
-                <a:spcPts val="1000"/>
+                <a:spcPts val="1100"/>
               </a:spcAft>
             </a:pPr>
             <a:r>
               <a:rPr sz="1600" b="1" i="0">
                 <a:solidFill>
-                  <a:srgbClr val="2E3A80"/>
-                </a:solidFill>
-                <a:latin typeface="Montserrat"/>
-              </a:rPr>
-              <a:t>•  </a:t>
+                  <a:srgbClr val="E8801A"/>
+                </a:solidFill>
+                <a:latin typeface="Montserrat"/>
+              </a:rPr>
+              <a:t>▸  </a:t>
             </a:r>
             <a:r>
               <a:rPr sz="1600" b="0" i="0">
@@ -11165,17 +11869,17 @@
           <a:p>
             <a:pPr>
               <a:spcAft>
-                <a:spcPts val="1000"/>
+                <a:spcPts val="1100"/>
               </a:spcAft>
             </a:pPr>
             <a:r>
               <a:rPr sz="1600" b="1" i="0">
                 <a:solidFill>
-                  <a:srgbClr val="2E3A80"/>
-                </a:solidFill>
-                <a:latin typeface="Montserrat"/>
-              </a:rPr>
-              <a:t>•  </a:t>
+                  <a:srgbClr val="E8801A"/>
+                </a:solidFill>
+                <a:latin typeface="Montserrat"/>
+              </a:rPr>
+              <a:t>▸  </a:t>
             </a:r>
             <a:r>
               <a:rPr sz="1600" b="0" i="0">
@@ -11191,7 +11895,7 @@
       </p:sp>
       <p:sp>
         <p:nvSpPr>
-          <p:cNvPr id="8" name="imgph" descr="IMGQ:propane gas cylinders storage installation"/>
+          <p:cNvPr id="9" name="imgph" descr="IMGQ:propane gas cylinders storage installation"/>
           <p:cNvSpPr/>
           <p:nvPr/>
         </p:nvSpPr>
@@ -11237,7 +11941,7 @@
       </p:sp>
       <p:sp>
         <p:nvSpPr>
-          <p:cNvPr id="9" name="TextBox 8"/>
+          <p:cNvPr id="10" name="TextBox 9"/>
           <p:cNvSpPr txBox="1"/>
           <p:nvPr/>
         </p:nvSpPr>
@@ -11422,7 +12126,7 @@
         <p:spPr>
           <a:xfrm>
             <a:off x="822960" y="457200"/>
-            <a:ext cx="8229600" cy="365760"/>
+            <a:ext cx="10058400" cy="365760"/>
           </a:xfrm>
           <a:prstGeom prst="rect">
             <a:avLst/>
@@ -11436,9 +12140,9 @@
           <a:lstStyle/>
           <a:p>
             <a:r>
-              <a:rPr sz="1200" b="1" i="0">
-                <a:solidFill>
-                  <a:srgbClr val="64748B"/>
+              <a:rPr sz="1300" b="1" i="0">
+                <a:solidFill>
+                  <a:srgbClr val="E8801A"/>
                 </a:solidFill>
                 <a:latin typeface="Montserrat"/>
               </a:rPr>
@@ -11470,7 +12174,7 @@
           <a:lstStyle/>
           <a:p>
             <a:r>
-              <a:rPr sz="2700" b="1" i="0">
+              <a:rPr sz="2800" b="1" i="0">
                 <a:solidFill>
                   <a:srgbClr val="1E2761"/>
                 </a:solidFill>
@@ -11483,13 +12187,57 @@
       </p:sp>
       <p:sp>
         <p:nvSpPr>
-          <p:cNvPr id="7" name="TextBox 6"/>
+          <p:cNvPr id="7" name="Rounded Rectangle 6"/>
+          <p:cNvSpPr/>
+          <p:nvPr/>
+        </p:nvSpPr>
+        <p:spPr>
+          <a:xfrm>
+            <a:off x="868680" y="1627632"/>
+            <a:ext cx="2011680" cy="73152"/>
+          </a:xfrm>
+          <a:prstGeom prst="roundRect">
+            <a:avLst/>
+          </a:prstGeom>
+          <a:solidFill>
+            <a:srgbClr val="E8801A"/>
+          </a:solidFill>
+          <a:ln>
+            <a:noFill/>
+          </a:ln>
+          <a:effectLst/>
+        </p:spPr>
+        <p:style>
+          <a:lnRef idx="1">
+            <a:schemeClr val="accent1"/>
+          </a:lnRef>
+          <a:fillRef idx="3">
+            <a:schemeClr val="accent1"/>
+          </a:fillRef>
+          <a:effectRef idx="2">
+            <a:schemeClr val="accent1"/>
+          </a:effectRef>
+          <a:fontRef idx="minor">
+            <a:schemeClr val="lt1"/>
+          </a:fontRef>
+        </p:style>
+        <p:txBody>
+          <a:bodyPr rtlCol="0" anchor="ctr"/>
+          <a:lstStyle/>
+          <a:p>
+            <a:pPr algn="ctr"/>
+          </a:p>
+        </p:txBody>
+      </p:sp>
+      <p:sp>
+        <p:nvSpPr>
+          <p:cNvPr id="8" name="TextBox 7"/>
           <p:cNvSpPr txBox="1"/>
           <p:nvPr/>
         </p:nvSpPr>
         <p:spPr>
           <a:xfrm>
-            <a:off x="822960" y="1920240"/>
+            <a:off x="822960" y="1965960"/>
             <a:ext cx="4983480" cy="4206240"/>
           </a:xfrm>
           <a:prstGeom prst="rect">
@@ -11505,17 +12253,17 @@
           <a:p>
             <a:pPr>
               <a:spcAft>
-                <a:spcPts val="1000"/>
+                <a:spcPts val="1100"/>
               </a:spcAft>
             </a:pPr>
             <a:r>
               <a:rPr sz="1600" b="1" i="0">
                 <a:solidFill>
-                  <a:srgbClr val="2E3A80"/>
-                </a:solidFill>
-                <a:latin typeface="Montserrat"/>
-              </a:rPr>
-              <a:t>•  </a:t>
+                  <a:srgbClr val="E8801A"/>
+                </a:solidFill>
+                <a:latin typeface="Montserrat"/>
+              </a:rPr>
+              <a:t>▸  </a:t>
             </a:r>
             <a:r>
               <a:rPr sz="1600" b="0" i="0">
@@ -11530,17 +12278,17 @@
           <a:p>
             <a:pPr>
               <a:spcAft>
-                <a:spcPts val="1000"/>
+                <a:spcPts val="1100"/>
               </a:spcAft>
             </a:pPr>
             <a:r>
               <a:rPr sz="1600" b="1" i="0">
                 <a:solidFill>
-                  <a:srgbClr val="2E3A80"/>
-                </a:solidFill>
-                <a:latin typeface="Montserrat"/>
-              </a:rPr>
-              <a:t>•  </a:t>
+                  <a:srgbClr val="E8801A"/>
+                </a:solidFill>
+                <a:latin typeface="Montserrat"/>
+              </a:rPr>
+              <a:t>▸  </a:t>
             </a:r>
             <a:r>
               <a:rPr sz="1600" b="0" i="0">
@@ -11555,17 +12303,17 @@
           <a:p>
             <a:pPr>
               <a:spcAft>
-                <a:spcPts val="1000"/>
+                <a:spcPts val="1100"/>
               </a:spcAft>
             </a:pPr>
             <a:r>
               <a:rPr sz="1600" b="1" i="0">
                 <a:solidFill>
-                  <a:srgbClr val="2E3A80"/>
-                </a:solidFill>
-                <a:latin typeface="Montserrat"/>
-              </a:rPr>
-              <a:t>•  </a:t>
+                  <a:srgbClr val="E8801A"/>
+                </a:solidFill>
+                <a:latin typeface="Montserrat"/>
+              </a:rPr>
+              <a:t>▸  </a:t>
             </a:r>
             <a:r>
               <a:rPr sz="1600" b="0" i="0">
@@ -11581,7 +12329,7 @@
       </p:sp>
       <p:sp>
         <p:nvSpPr>
-          <p:cNvPr id="8" name="imgph" descr="IMGQ:outdoor gas pipe on building exterior wall"/>
+          <p:cNvPr id="9" name="imgph" descr="IMGQ:outdoor gas pipe on building exterior wall"/>
           <p:cNvSpPr/>
           <p:nvPr/>
         </p:nvSpPr>
@@ -11627,7 +12375,7 @@
       </p:sp>
       <p:sp>
         <p:nvSpPr>
-          <p:cNvPr id="9" name="TextBox 8"/>
+          <p:cNvPr id="10" name="TextBox 9"/>
           <p:cNvSpPr txBox="1"/>
           <p:nvPr/>
         </p:nvSpPr>
@@ -11812,7 +12560,7 @@
         <p:spPr>
           <a:xfrm>
             <a:off x="822960" y="457200"/>
-            <a:ext cx="8229600" cy="365760"/>
+            <a:ext cx="10058400" cy="365760"/>
           </a:xfrm>
           <a:prstGeom prst="rect">
             <a:avLst/>
@@ -11826,9 +12574,9 @@
           <a:lstStyle/>
           <a:p>
             <a:r>
-              <a:rPr sz="1200" b="1" i="0">
-                <a:solidFill>
-                  <a:srgbClr val="64748B"/>
+              <a:rPr sz="1300" b="1" i="0">
+                <a:solidFill>
+                  <a:srgbClr val="E8801A"/>
                 </a:solidFill>
                 <a:latin typeface="Montserrat"/>
               </a:rPr>
@@ -11860,7 +12608,7 @@
           <a:lstStyle/>
           <a:p>
             <a:r>
-              <a:rPr sz="2700" b="1" i="0">
+              <a:rPr sz="2800" b="1" i="0">
                 <a:solidFill>
                   <a:srgbClr val="1E2761"/>
                 </a:solidFill>
@@ -11873,13 +12621,57 @@
       </p:sp>
       <p:sp>
         <p:nvSpPr>
-          <p:cNvPr id="7" name="TextBox 6"/>
+          <p:cNvPr id="7" name="Rounded Rectangle 6"/>
+          <p:cNvSpPr/>
+          <p:nvPr/>
+        </p:nvSpPr>
+        <p:spPr>
+          <a:xfrm>
+            <a:off x="868680" y="1627632"/>
+            <a:ext cx="2011680" cy="73152"/>
+          </a:xfrm>
+          <a:prstGeom prst="roundRect">
+            <a:avLst/>
+          </a:prstGeom>
+          <a:solidFill>
+            <a:srgbClr val="E8801A"/>
+          </a:solidFill>
+          <a:ln>
+            <a:noFill/>
+          </a:ln>
+          <a:effectLst/>
+        </p:spPr>
+        <p:style>
+          <a:lnRef idx="1">
+            <a:schemeClr val="accent1"/>
+          </a:lnRef>
+          <a:fillRef idx="3">
+            <a:schemeClr val="accent1"/>
+          </a:fillRef>
+          <a:effectRef idx="2">
+            <a:schemeClr val="accent1"/>
+          </a:effectRef>
+          <a:fontRef idx="minor">
+            <a:schemeClr val="lt1"/>
+          </a:fontRef>
+        </p:style>
+        <p:txBody>
+          <a:bodyPr rtlCol="0" anchor="ctr"/>
+          <a:lstStyle/>
+          <a:p>
+            <a:pPr algn="ctr"/>
+          </a:p>
+        </p:txBody>
+      </p:sp>
+      <p:sp>
+        <p:nvSpPr>
+          <p:cNvPr id="8" name="TextBox 7"/>
           <p:cNvSpPr txBox="1"/>
           <p:nvPr/>
         </p:nvSpPr>
         <p:spPr>
           <a:xfrm>
-            <a:off x="822960" y="1920240"/>
+            <a:off x="822960" y="1965960"/>
             <a:ext cx="4983480" cy="4206240"/>
           </a:xfrm>
           <a:prstGeom prst="rect">
@@ -11895,17 +12687,17 @@
           <a:p>
             <a:pPr>
               <a:spcAft>
-                <a:spcPts val="1000"/>
+                <a:spcPts val="1100"/>
               </a:spcAft>
             </a:pPr>
             <a:r>
               <a:rPr sz="1600" b="1" i="0">
                 <a:solidFill>
-                  <a:srgbClr val="2E3A80"/>
-                </a:solidFill>
-                <a:latin typeface="Montserrat"/>
-              </a:rPr>
-              <a:t>•  </a:t>
+                  <a:srgbClr val="E8801A"/>
+                </a:solidFill>
+                <a:latin typeface="Montserrat"/>
+              </a:rPr>
+              <a:t>▸  </a:t>
             </a:r>
             <a:r>
               <a:rPr sz="1600" b="0" i="0">
@@ -11920,17 +12712,17 @@
           <a:p>
             <a:pPr>
               <a:spcAft>
-                <a:spcPts val="1000"/>
+                <a:spcPts val="1100"/>
               </a:spcAft>
             </a:pPr>
             <a:r>
               <a:rPr sz="1600" b="1" i="0">
                 <a:solidFill>
-                  <a:srgbClr val="2E3A80"/>
-                </a:solidFill>
-                <a:latin typeface="Montserrat"/>
-              </a:rPr>
-              <a:t>•  </a:t>
+                  <a:srgbClr val="E8801A"/>
+                </a:solidFill>
+                <a:latin typeface="Montserrat"/>
+              </a:rPr>
+              <a:t>▸  </a:t>
             </a:r>
             <a:r>
               <a:rPr sz="1600" b="0" i="0">
@@ -11945,17 +12737,17 @@
           <a:p>
             <a:pPr>
               <a:spcAft>
-                <a:spcPts val="1000"/>
+                <a:spcPts val="1100"/>
               </a:spcAft>
             </a:pPr>
             <a:r>
               <a:rPr sz="1600" b="1" i="0">
                 <a:solidFill>
-                  <a:srgbClr val="2E3A80"/>
-                </a:solidFill>
-                <a:latin typeface="Montserrat"/>
-              </a:rPr>
-              <a:t>•  </a:t>
+                  <a:srgbClr val="E8801A"/>
+                </a:solidFill>
+                <a:latin typeface="Montserrat"/>
+              </a:rPr>
+              <a:t>▸  </a:t>
             </a:r>
             <a:r>
               <a:rPr sz="1600" b="0" i="0">
@@ -11970,17 +12762,17 @@
           <a:p>
             <a:pPr>
               <a:spcAft>
-                <a:spcPts val="1000"/>
+                <a:spcPts val="1100"/>
               </a:spcAft>
             </a:pPr>
             <a:r>
               <a:rPr sz="1600" b="1" i="0">
                 <a:solidFill>
-                  <a:srgbClr val="2E3A80"/>
-                </a:solidFill>
-                <a:latin typeface="Montserrat"/>
-              </a:rPr>
-              <a:t>•  </a:t>
+                  <a:srgbClr val="E8801A"/>
+                </a:solidFill>
+                <a:latin typeface="Montserrat"/>
+              </a:rPr>
+              <a:t>▸  </a:t>
             </a:r>
             <a:r>
               <a:rPr sz="1600" b="0" i="0">
@@ -11996,7 +12788,7 @@
       </p:sp>
       <p:sp>
         <p:nvSpPr>
-          <p:cNvPr id="8" name="imgph" descr="IMGQ:gas regulation metering station equipment room"/>
+          <p:cNvPr id="9" name="imgph" descr="IMGQ:gas regulation metering station equipment room"/>
           <p:cNvSpPr/>
           <p:nvPr/>
         </p:nvSpPr>
@@ -12042,7 +12834,7 @@
       </p:sp>
       <p:sp>
         <p:nvSpPr>
-          <p:cNvPr id="9" name="TextBox 8"/>
+          <p:cNvPr id="10" name="TextBox 9"/>
           <p:cNvSpPr txBox="1"/>
           <p:nvPr/>
         </p:nvSpPr>
@@ -12227,7 +13019,7 @@
         <p:spPr>
           <a:xfrm>
             <a:off x="822960" y="457200"/>
-            <a:ext cx="8229600" cy="365760"/>
+            <a:ext cx="10058400" cy="365760"/>
           </a:xfrm>
           <a:prstGeom prst="rect">
             <a:avLst/>
@@ -12241,9 +13033,9 @@
           <a:lstStyle/>
           <a:p>
             <a:r>
-              <a:rPr sz="1200" b="1" i="0">
-                <a:solidFill>
-                  <a:srgbClr val="64748B"/>
+              <a:rPr sz="1300" b="1" i="0">
+                <a:solidFill>
+                  <a:srgbClr val="E8801A"/>
                 </a:solidFill>
                 <a:latin typeface="Montserrat"/>
               </a:rPr>
@@ -12275,7 +13067,7 @@
           <a:lstStyle/>
           <a:p>
             <a:r>
-              <a:rPr sz="2700" b="1" i="0">
+              <a:rPr sz="2800" b="1" i="0">
                 <a:solidFill>
                   <a:srgbClr val="1E2761"/>
                 </a:solidFill>
@@ -12288,13 +13080,57 @@
       </p:sp>
       <p:sp>
         <p:nvSpPr>
-          <p:cNvPr id="7" name="TextBox 6"/>
+          <p:cNvPr id="7" name="Rounded Rectangle 6"/>
+          <p:cNvSpPr/>
+          <p:nvPr/>
+        </p:nvSpPr>
+        <p:spPr>
+          <a:xfrm>
+            <a:off x="868680" y="1627632"/>
+            <a:ext cx="2011680" cy="73152"/>
+          </a:xfrm>
+          <a:prstGeom prst="roundRect">
+            <a:avLst/>
+          </a:prstGeom>
+          <a:solidFill>
+            <a:srgbClr val="E8801A"/>
+          </a:solidFill>
+          <a:ln>
+            <a:noFill/>
+          </a:ln>
+          <a:effectLst/>
+        </p:spPr>
+        <p:style>
+          <a:lnRef idx="1">
+            <a:schemeClr val="accent1"/>
+          </a:lnRef>
+          <a:fillRef idx="3">
+            <a:schemeClr val="accent1"/>
+          </a:fillRef>
+          <a:effectRef idx="2">
+            <a:schemeClr val="accent1"/>
+          </a:effectRef>
+          <a:fontRef idx="minor">
+            <a:schemeClr val="lt1"/>
+          </a:fontRef>
+        </p:style>
+        <p:txBody>
+          <a:bodyPr rtlCol="0" anchor="ctr"/>
+          <a:lstStyle/>
+          <a:p>
+            <a:pPr algn="ctr"/>
+          </a:p>
+        </p:txBody>
+      </p:sp>
+      <p:sp>
+        <p:nvSpPr>
+          <p:cNvPr id="8" name="TextBox 7"/>
           <p:cNvSpPr txBox="1"/>
           <p:nvPr/>
         </p:nvSpPr>
         <p:spPr>
           <a:xfrm>
-            <a:off x="822960" y="1920240"/>
+            <a:off x="822960" y="1965960"/>
             <a:ext cx="4983480" cy="4206240"/>
           </a:xfrm>
           <a:prstGeom prst="rect">
@@ -12310,17 +13146,17 @@
           <a:p>
             <a:pPr>
               <a:spcAft>
-                <a:spcPts val="1000"/>
+                <a:spcPts val="1100"/>
               </a:spcAft>
             </a:pPr>
             <a:r>
               <a:rPr sz="1600" b="1" i="0">
                 <a:solidFill>
-                  <a:srgbClr val="2E3A80"/>
-                </a:solidFill>
-                <a:latin typeface="Montserrat"/>
-              </a:rPr>
-              <a:t>•  </a:t>
+                  <a:srgbClr val="E8801A"/>
+                </a:solidFill>
+                <a:latin typeface="Montserrat"/>
+              </a:rPr>
+              <a:t>▸  </a:t>
             </a:r>
             <a:r>
               <a:rPr sz="1600" b="0" i="0">
@@ -12335,17 +13171,17 @@
           <a:p>
             <a:pPr>
               <a:spcAft>
-                <a:spcPts val="1000"/>
+                <a:spcPts val="1100"/>
               </a:spcAft>
             </a:pPr>
             <a:r>
               <a:rPr sz="1600" b="1" i="0">
                 <a:solidFill>
-                  <a:srgbClr val="2E3A80"/>
-                </a:solidFill>
-                <a:latin typeface="Montserrat"/>
-              </a:rPr>
-              <a:t>•  </a:t>
+                  <a:srgbClr val="E8801A"/>
+                </a:solidFill>
+                <a:latin typeface="Montserrat"/>
+              </a:rPr>
+              <a:t>▸  </a:t>
             </a:r>
             <a:r>
               <a:rPr sz="1600" b="0" i="0">
@@ -12360,17 +13196,17 @@
           <a:p>
             <a:pPr>
               <a:spcAft>
-                <a:spcPts val="1000"/>
+                <a:spcPts val="1100"/>
               </a:spcAft>
             </a:pPr>
             <a:r>
               <a:rPr sz="1600" b="1" i="0">
                 <a:solidFill>
-                  <a:srgbClr val="2E3A80"/>
-                </a:solidFill>
-                <a:latin typeface="Montserrat"/>
-              </a:rPr>
-              <a:t>•  </a:t>
+                  <a:srgbClr val="E8801A"/>
+                </a:solidFill>
+                <a:latin typeface="Montserrat"/>
+              </a:rPr>
+              <a:t>▸  </a:t>
             </a:r>
             <a:r>
               <a:rPr sz="1600" b="0" i="0">
@@ -12386,7 +13222,7 @@
       </p:sp>
       <p:sp>
         <p:nvSpPr>
-          <p:cNvPr id="8" name="imgph" descr="IMGQ:electrical grounding connection metal gas pipe"/>
+          <p:cNvPr id="9" name="imgph" descr="IMGQ:electrical grounding connection metal gas pipe"/>
           <p:cNvSpPr/>
           <p:nvPr/>
         </p:nvSpPr>
@@ -12432,7 +13268,7 @@
       </p:sp>
       <p:sp>
         <p:nvSpPr>
-          <p:cNvPr id="9" name="TextBox 8"/>
+          <p:cNvPr id="10" name="TextBox 9"/>
           <p:cNvSpPr txBox="1"/>
           <p:nvPr/>
         </p:nvSpPr>

--- a/Curso Gas B/16 - UNE 60670 - Instalaciones en servicio y control periodico/16 - UNE 60670 - Instalaciones en servicio y control periodico - Vídeo 3.pptx
+++ b/Curso Gas B/16 - UNE 60670 - Instalaciones en servicio y control periodico/16 - UNE 60670 - Instalaciones en servicio y control periodico - Vídeo 3.pptx
@@ -611,12 +611,12 @@
           <a:lstStyle/>
           <a:p>
             <a:r>
-              <a:t>N1: ¿Por qué no apta sin medir?</a:t>
-            </a:r>
-          </a:p>
-          <a:p>
-            <a:r>
-              <a:t>N2: Porque el GLP es más pesado que el aire: cuando escapa se va al suelo y se acumula abajo, formando una bolsa invisible que espera una chispa. No hay escalera de litros por hora que valga. El truco: el gas natural sube y se disipa; el propano no perdona, baja y explota abajo.</a:t>
+              <a:t>N2: La respuesta correcta es la opción B: es no apta sin necesidad de medir el caudal. El GLP es más pesado que el aire: cuando escapa se va al suelo y se acumula abajo, formando una bolsa invisible que espera una chispa. Por eso cualquier fuga lo deja no apto y no hay escalera de litros por hora que valga. El truco: el gas natural sube y se disipa; el propano no perdona, baja y explota abajo.</a:t>
+            </a:r>
+          </a:p>
+          <a:p>
+            <a:r>
+              <a:t>N1: Con GLP, guardas el medidor: no apta y punto.</a:t>
             </a:r>
           </a:p>
         </p:txBody>
@@ -1111,12 +1111,12 @@
           <a:lstStyle/>
           <a:p>
             <a:r>
-              <a:t>N1: Un dato que cae tal cual y con trampa en las cifras. ¿Qué extintor va junto al recinto de la ERM?</a:t>
-            </a:r>
-          </a:p>
-          <a:p>
-            <a:r>
-              <a:t>N2: Fíjate en tres cosas: el tipo de agente, los kilos y si va dentro o fuera.</a:t>
+              <a:t>N1: Un dato que cae tal cual y con trampa en las cifras. Escucha la pregunta y las cuatro opciones. ¿Qué extintor debe existir junto al recinto de la estación de regulación y medida? Opción A, de dióxido de carbono, de seis kilos, dentro del recinto; opción B, de polvo seco, de doce kilos, en el exterior del recinto; opción C, de agua, de diez kilos, junto al contador; opción D, de polvo seco, de seis kilos, dentro del recinto. Fíjate en el agente, los kilos y si va dentro o fuera.</a:t>
+            </a:r>
+          </a:p>
+          <a:p>
+            <a:r>
+              <a:t>N2: Tres cosas que mirar: tipo de agente, capacidad y ubicación.</a:t>
             </a:r>
           </a:p>
         </p:txBody>
@@ -1186,12 +1186,12 @@
           <a:lstStyle/>
           <a:p>
             <a:r>
-              <a:t>N1: ¿Por qué doce kilos y en el exterior?</a:t>
-            </a:r>
-          </a:p>
-          <a:p>
-            <a:r>
-              <a:t>N2: Porque si la emergencia está dentro del recinto no vas a entrar a por el extintor entre llamas o gas: lo quieres a mano, fuera y accesible. Y el agente es polvo seco, capacidad igual a doce kilos, revisado en fecha. En el examen te cambian el número para que piques: son doce, ni diez ni seis.</a:t>
+              <a:t>N2: La respuesta correcta es la opción B: de polvo seco, de doce kilos, en el exterior del recinto. Si la emergencia está dentro del recinto no vas a entrar a por el extintor entre llamas o gas: lo quieres a mano, fuera y accesible, revisado en fecha. En el examen te cambian el número para que piques: son doce kilos, ni diez ni seis, y polvo seco, no dióxido de carbono ni agua.</a:t>
+            </a:r>
+          </a:p>
+          <a:p>
+            <a:r>
+              <a:t>N1: Doce kilos, polvo seco, exterior. Clavado.</a:t>
             </a:r>
           </a:p>
         </p:txBody>
@@ -2186,12 +2186,12 @@
           <a:lstStyle/>
           <a:p>
             <a:r>
-              <a:t>N1: A usar la escalera. Gas natural, sitio no peligroso, y mides tres litros por hora de fuga. ¿En qué cajón cae?</a:t>
-            </a:r>
-          </a:p>
-          <a:p>
-            <a:r>
-              <a:t>N2: Recuerda los dos escalones, el de abajo y el de arriba, y mira dónde queda el tres.</a:t>
+              <a:t>N1: A usar la escalera. Escucha la pregunta y las cuatro opciones. Gas natural, sitio interior no peligroso, y mides una fuga de tres litros por hora, ¿cómo queda la instalación? Opción A, apta, sin más; opción B, en aptitud pendiente de corrección, secundaria; opción C, no apta, principal; opción D, no apta solo si no hay ventilación. Piensa un momento dónde cae el tres.</a:t>
+            </a:r>
+          </a:p>
+          <a:p>
+            <a:r>
+              <a:t>N2: Recuerda los dos escalones, el de abajo y el de arriba, uno y cinco.</a:t>
             </a:r>
           </a:p>
         </p:txBody>
@@ -2261,12 +2261,12 @@
           <a:lstStyle/>
           <a:p>
             <a:r>
-              <a:t>N1: ¿Por qué pendiente de corrección?</a:t>
-            </a:r>
-          </a:p>
-          <a:p>
-            <a:r>
-              <a:t>N2: Porque tres litros por hora está entre uno y cinco, la franja intermedia: apta pendiente de corrección, secundaria. Por debajo de un litro por hora sería apta; por encima de cinco, no apta y principal. Memoriza los dos números, uno y cinco, y los tres cajones.</a:t>
+              <a:t>N2: La respuesta correcta es la opción B: en aptitud pendiente de corrección, que es secundaria. Tres litros por hora está entre uno y cinco, la franja intermedia. Por debajo de un litro por hora sería apta; por encima de cinco, no apta y principal. Memoriza los dos números, uno y cinco, y los tres cajones: apta, pendiente, no apta.</a:t>
+            </a:r>
+          </a:p>
+          <a:p>
+            <a:r>
+              <a:t>N1: El tres cae en medio: pendiente de corrección.</a:t>
             </a:r>
           </a:p>
         </p:txBody>
@@ -2506,7 +2506,7 @@
           <a:lstStyle/>
           <a:p>
             <a:r>
-              <a:t>N1: Ojo con esta, que cambia toda la lógica. Fuga pequeña, pero es GLP. ¿Sacas el medidor?</a:t>
+              <a:t>N1: Ojo con esta, que cambia toda la lógica. Escucha la pregunta y las cuatro opciones. Detectas una pequeña fuga en una instalación de GLP, un gas más denso que el aire, ¿qué haces? Opción A, mides el caudal y aplicas la escalera de litros por hora; opción B, es no apta sin necesidad de medir el caudal; opción C, es apta si baja de un litro por hora; opción D, solo es secundaria si el local ventila. Párate a pensarlo.</a:t>
             </a:r>
           </a:p>
           <a:p>
